--- a/lectures/week-02/lecture-zh.pptx
+++ b/lectures/week-02/lecture-zh.pptx
@@ -1420,7 +1420,7 @@
         </p:nvSpPr>
         <p:spPr>
           <a:xfrm rot="0" flipH="0" flipV="0">
-            <a:off x="800100" y="1085850"/>
+            <a:off x="800100" y="1448400"/>
             <a:ext cx="5334000" cy="190500"/>
           </a:xfrm>
           <a:prstGeom prst="rect"/>
@@ -1465,7 +1465,7 @@
         </p:nvSpPr>
         <p:spPr>
           <a:xfrm rot="0" flipH="0" flipV="0">
-            <a:off x="800100" y="1409700"/>
+            <a:off x="800100" y="1772250"/>
             <a:ext cx="5334000" cy="2619375"/>
           </a:xfrm>
           <a:prstGeom prst="roundRect">
@@ -1491,7 +1491,7 @@
         </p:nvSpPr>
         <p:spPr>
           <a:xfrm rot="0" flipH="0" flipV="0">
-            <a:off x="1009650" y="1581150"/>
+            <a:off x="1009650" y="1943700"/>
             <a:ext cx="4914900" cy="161925"/>
           </a:xfrm>
           <a:prstGeom prst="rect"/>
@@ -1546,7 +1546,7 @@
         </p:nvSpPr>
         <p:spPr>
           <a:xfrm rot="0" flipH="0" flipV="0">
-            <a:off x="1009650" y="1819275"/>
+            <a:off x="1009650" y="2181825"/>
             <a:ext cx="4914900" cy="933450"/>
           </a:xfrm>
           <a:prstGeom prst="rect"/>
@@ -1617,7 +1617,7 @@
         </p:nvSpPr>
         <p:spPr>
           <a:xfrm rot="0" flipH="0" flipV="0">
-            <a:off x="1009650" y="2867025"/>
+            <a:off x="1009650" y="3229575"/>
             <a:ext cx="4914900" cy="9525"/>
           </a:xfrm>
           <a:prstGeom prst="rect">
@@ -1643,7 +1643,7 @@
         </p:nvSpPr>
         <p:spPr>
           <a:xfrm rot="0" flipH="0" flipV="0">
-            <a:off x="1009650" y="2990850"/>
+            <a:off x="1009650" y="3353400"/>
             <a:ext cx="4914900" cy="161925"/>
           </a:xfrm>
           <a:prstGeom prst="rect"/>
@@ -1698,7 +1698,7 @@
         </p:nvSpPr>
         <p:spPr>
           <a:xfrm rot="0" flipH="0" flipV="0">
-            <a:off x="1009650" y="3228975"/>
+            <a:off x="1009650" y="3591525"/>
             <a:ext cx="4914900" cy="628650"/>
           </a:xfrm>
           <a:prstGeom prst="rect"/>
@@ -1771,7 +1771,7 @@
         </p:nvSpPr>
         <p:spPr>
           <a:xfrm rot="0" flipH="0" flipV="0">
-            <a:off x="800100" y="4162425"/>
+            <a:off x="800100" y="4524975"/>
             <a:ext cx="5334000" cy="762000"/>
           </a:xfrm>
           <a:prstGeom prst="roundRect">
@@ -1802,7 +1802,7 @@
         </p:nvSpPr>
         <p:spPr>
           <a:xfrm rot="0" flipH="0" flipV="0">
-            <a:off x="971550" y="4276725"/>
+            <a:off x="971550" y="4639275"/>
             <a:ext cx="4991100" cy="533400"/>
           </a:xfrm>
           <a:prstGeom prst="rect"/>
@@ -1889,7 +1889,7 @@
         </p:nvSpPr>
         <p:spPr>
           <a:xfrm rot="0" flipH="0" flipV="0">
-            <a:off x="6419850" y="1695450"/>
+            <a:off x="6419850" y="2058000"/>
             <a:ext cx="4972050" cy="304800"/>
           </a:xfrm>
           <a:prstGeom prst="rect"/>
@@ -1924,7 +1924,7 @@
         </p:nvSpPr>
         <p:spPr>
           <a:xfrm rot="0" flipH="0" flipV="0">
-            <a:off x="6419850" y="2133600"/>
+            <a:off x="6419850" y="2496150"/>
             <a:ext cx="4972050" cy="742950"/>
           </a:xfrm>
           <a:prstGeom prst="roundRect">
@@ -1955,7 +1955,7 @@
         </p:nvSpPr>
         <p:spPr>
           <a:xfrm rot="0" flipH="0" flipV="0">
-            <a:off x="6591300" y="2266950"/>
+            <a:off x="6591300" y="2629500"/>
             <a:ext cx="381000" cy="381000"/>
           </a:xfrm>
           <a:prstGeom prst="roundRect">
@@ -1995,7 +1995,7 @@
         </p:blipFill>
         <p:spPr>
           <a:xfrm rot="0" flipH="0" flipV="0">
-            <a:off x="6686550" y="2362200"/>
+            <a:off x="6686550" y="2724750"/>
             <a:ext cx="190500" cy="190500"/>
           </a:xfrm>
           <a:prstGeom prst="rect">
@@ -2012,7 +2012,7 @@
         </p:nvSpPr>
         <p:spPr>
           <a:xfrm rot="0" flipH="0" flipV="0">
-            <a:off x="7105650" y="2266950"/>
+            <a:off x="7105650" y="2629500"/>
             <a:ext cx="3905250" cy="200025"/>
           </a:xfrm>
           <a:prstGeom prst="rect"/>
@@ -2057,7 +2057,7 @@
         </p:nvSpPr>
         <p:spPr>
           <a:xfrm rot="0" flipH="0" flipV="0">
-            <a:off x="7105650" y="2486025"/>
+            <a:off x="7105650" y="2848575"/>
             <a:ext cx="3905250" cy="257175"/>
           </a:xfrm>
           <a:prstGeom prst="rect"/>
@@ -2132,7 +2132,7 @@
         </p:nvSpPr>
         <p:spPr>
           <a:xfrm rot="0" flipH="0" flipV="0">
-            <a:off x="6419850" y="3009900"/>
+            <a:off x="6419850" y="3372450"/>
             <a:ext cx="4972050" cy="742950"/>
           </a:xfrm>
           <a:prstGeom prst="roundRect">
@@ -2163,7 +2163,7 @@
         </p:nvSpPr>
         <p:spPr>
           <a:xfrm rot="0" flipH="0" flipV="0">
-            <a:off x="6591300" y="3143250"/>
+            <a:off x="6591300" y="3505800"/>
             <a:ext cx="381000" cy="381000"/>
           </a:xfrm>
           <a:prstGeom prst="roundRect">
@@ -2203,7 +2203,7 @@
         </p:blipFill>
         <p:spPr>
           <a:xfrm rot="0" flipH="0" flipV="0">
-            <a:off x="6686550" y="3238500"/>
+            <a:off x="6686550" y="3601050"/>
             <a:ext cx="190500" cy="190500"/>
           </a:xfrm>
           <a:prstGeom prst="rect">
@@ -2220,7 +2220,7 @@
         </p:nvSpPr>
         <p:spPr>
           <a:xfrm rot="0" flipH="0" flipV="0">
-            <a:off x="7105650" y="3143250"/>
+            <a:off x="7105650" y="3505800"/>
             <a:ext cx="4019550" cy="200025"/>
           </a:xfrm>
           <a:prstGeom prst="rect"/>
@@ -2255,7 +2255,7 @@
         </p:nvSpPr>
         <p:spPr>
           <a:xfrm rot="0" flipH="0" flipV="0">
-            <a:off x="7105650" y="3362325"/>
+            <a:off x="7105650" y="3724875"/>
             <a:ext cx="4019550" cy="257175"/>
           </a:xfrm>
           <a:prstGeom prst="rect"/>
@@ -2340,7 +2340,7 @@
         </p:nvSpPr>
         <p:spPr>
           <a:xfrm rot="0" flipH="0" flipV="0">
-            <a:off x="6419850" y="3886200"/>
+            <a:off x="6419850" y="4248750"/>
             <a:ext cx="4972050" cy="742950"/>
           </a:xfrm>
           <a:prstGeom prst="roundRect">
@@ -2371,7 +2371,7 @@
         </p:nvSpPr>
         <p:spPr>
           <a:xfrm rot="0" flipH="0" flipV="0">
-            <a:off x="6591300" y="4019550"/>
+            <a:off x="6591300" y="4382100"/>
             <a:ext cx="381000" cy="381000"/>
           </a:xfrm>
           <a:prstGeom prst="roundRect">
@@ -2411,7 +2411,7 @@
         </p:blipFill>
         <p:spPr>
           <a:xfrm rot="0" flipH="0" flipV="0">
-            <a:off x="6686550" y="4114800"/>
+            <a:off x="6686550" y="4477350"/>
             <a:ext cx="190500" cy="190500"/>
           </a:xfrm>
           <a:prstGeom prst="rect">
@@ -2428,7 +2428,7 @@
         </p:nvSpPr>
         <p:spPr>
           <a:xfrm rot="0" flipH="0" flipV="0">
-            <a:off x="7105650" y="4019550"/>
+            <a:off x="7105650" y="4382100"/>
             <a:ext cx="3038475" cy="200025"/>
           </a:xfrm>
           <a:prstGeom prst="rect"/>
@@ -2473,7 +2473,7 @@
         </p:nvSpPr>
         <p:spPr>
           <a:xfrm rot="0" flipH="0" flipV="0">
-            <a:off x="7105650" y="4238625"/>
+            <a:off x="7105650" y="4601175"/>
             <a:ext cx="3038475" cy="257175"/>
           </a:xfrm>
           <a:prstGeom prst="rect"/>
@@ -2508,7 +2508,7 @@
         </p:nvSpPr>
         <p:spPr>
           <a:xfrm rot="0" flipH="0" flipV="0">
-            <a:off x="6419850" y="4762500"/>
+            <a:off x="6419850" y="5125050"/>
             <a:ext cx="5010150" cy="590550"/>
           </a:xfrm>
           <a:custGeom>
@@ -2548,7 +2548,7 @@
         </p:nvSpPr>
         <p:spPr>
           <a:xfrm rot="0" flipH="0" flipV="0">
-            <a:off x="6591300" y="4762500"/>
+            <a:off x="6591300" y="5125050"/>
             <a:ext cx="4800600" cy="590550"/>
           </a:xfrm>
           <a:prstGeom prst="rect"/>
@@ -2897,7 +2897,7 @@
         </p:nvSpPr>
         <p:spPr>
           <a:xfrm rot="0" flipH="0" flipV="0">
-            <a:off x="800100" y="1085850"/>
+            <a:off x="800100" y="1719862"/>
             <a:ext cx="5334000" cy="3114675"/>
           </a:xfrm>
           <a:prstGeom prst="roundRect">
@@ -2923,7 +2923,7 @@
         </p:nvSpPr>
         <p:spPr>
           <a:xfrm rot="0" flipH="0" flipV="0">
-            <a:off x="1009650" y="1238250"/>
+            <a:off x="1009650" y="1872262"/>
             <a:ext cx="4914900" cy="161925"/>
           </a:xfrm>
           <a:prstGeom prst="rect"/>
@@ -2978,7 +2978,7 @@
         </p:nvSpPr>
         <p:spPr>
           <a:xfrm rot="0" flipH="0" flipV="0">
-            <a:off x="1009650" y="1457325"/>
+            <a:off x="1009650" y="2091337"/>
             <a:ext cx="4914900" cy="1238250"/>
           </a:xfrm>
           <a:prstGeom prst="rect"/>
@@ -3187,7 +3187,7 @@
         </p:nvSpPr>
         <p:spPr>
           <a:xfrm rot="0" flipH="0" flipV="0">
-            <a:off x="1009650" y="2790825"/>
+            <a:off x="1009650" y="3424837"/>
             <a:ext cx="4914900" cy="9525"/>
           </a:xfrm>
           <a:prstGeom prst="rect">
@@ -3213,7 +3213,7 @@
         </p:nvSpPr>
         <p:spPr>
           <a:xfrm rot="0" flipH="0" flipV="0">
-            <a:off x="1009650" y="2895600"/>
+            <a:off x="1009650" y="3529612"/>
             <a:ext cx="4914900" cy="161925"/>
           </a:xfrm>
           <a:prstGeom prst="rect"/>
@@ -3268,7 +3268,7 @@
         </p:nvSpPr>
         <p:spPr>
           <a:xfrm rot="0" flipH="0" flipV="0">
-            <a:off x="1009650" y="3114675"/>
+            <a:off x="1009650" y="3748687"/>
             <a:ext cx="4914900" cy="933450"/>
           </a:xfrm>
           <a:prstGeom prst="rect"/>
@@ -3369,7 +3369,7 @@
         </p:nvSpPr>
         <p:spPr>
           <a:xfrm rot="0" flipH="0" flipV="0">
-            <a:off x="800100" y="4314825"/>
+            <a:off x="800100" y="4948837"/>
             <a:ext cx="5334000" cy="495300"/>
           </a:xfrm>
           <a:prstGeom prst="roundRect">
@@ -3400,7 +3400,7 @@
         </p:nvSpPr>
         <p:spPr>
           <a:xfrm rot="0" flipH="0" flipV="0">
-            <a:off x="971550" y="4429125"/>
+            <a:off x="971550" y="5063137"/>
             <a:ext cx="4991100" cy="266700"/>
           </a:xfrm>
           <a:prstGeom prst="rect"/>
@@ -3535,7 +3535,7 @@
         </p:nvSpPr>
         <p:spPr>
           <a:xfrm rot="0" flipH="0" flipV="0">
-            <a:off x="6419850" y="2324100"/>
+            <a:off x="6419850" y="2958112"/>
             <a:ext cx="4972050" cy="228600"/>
           </a:xfrm>
           <a:prstGeom prst="rect"/>
@@ -3580,7 +3580,7 @@
         </p:nvSpPr>
         <p:spPr>
           <a:xfrm rot="0" flipH="0" flipV="0">
-            <a:off x="6419850" y="2667000"/>
+            <a:off x="6419850" y="3301012"/>
             <a:ext cx="4972050" cy="276225"/>
           </a:xfrm>
           <a:prstGeom prst="rect"/>
@@ -3655,7 +3655,7 @@
         </p:nvSpPr>
         <p:spPr>
           <a:xfrm rot="0" flipH="0" flipV="0">
-            <a:off x="6419850" y="3057525"/>
+            <a:off x="6419850" y="3691537"/>
             <a:ext cx="4972050" cy="1000125"/>
           </a:xfrm>
           <a:prstGeom prst="roundRect">
@@ -3686,7 +3686,7 @@
         </p:nvSpPr>
         <p:spPr>
           <a:xfrm rot="0" flipH="0" flipV="0">
-            <a:off x="6610350" y="3209925"/>
+            <a:off x="6610350" y="3843937"/>
             <a:ext cx="1809750" cy="180975"/>
           </a:xfrm>
           <a:prstGeom prst="rect"/>
@@ -3735,7 +3735,7 @@
         </p:blipFill>
         <p:spPr>
           <a:xfrm rot="0" flipH="0" flipV="0">
-            <a:off x="8534400" y="3219450"/>
+            <a:off x="8534400" y="3853462"/>
             <a:ext cx="171450" cy="171450"/>
           </a:xfrm>
           <a:prstGeom prst="rect">
@@ -3752,7 +3752,7 @@
         </p:nvSpPr>
         <p:spPr>
           <a:xfrm rot="0" flipH="0" flipV="0">
-            <a:off x="8820150" y="3219450"/>
+            <a:off x="8820150" y="3853462"/>
             <a:ext cx="2381250" cy="161925"/>
           </a:xfrm>
           <a:prstGeom prst="rect"/>
@@ -3807,7 +3807,7 @@
         </p:nvSpPr>
         <p:spPr>
           <a:xfrm rot="0" flipH="0" flipV="0">
-            <a:off x="6610350" y="3467100"/>
+            <a:off x="6610350" y="4101112"/>
             <a:ext cx="1809750" cy="180975"/>
           </a:xfrm>
           <a:prstGeom prst="rect"/>
@@ -3856,7 +3856,7 @@
         </p:blipFill>
         <p:spPr>
           <a:xfrm rot="0" flipH="0" flipV="0">
-            <a:off x="8534400" y="3476625"/>
+            <a:off x="8534400" y="4110637"/>
             <a:ext cx="171450" cy="171450"/>
           </a:xfrm>
           <a:prstGeom prst="rect">
@@ -3873,7 +3873,7 @@
         </p:nvSpPr>
         <p:spPr>
           <a:xfrm rot="0" flipH="0" flipV="0">
-            <a:off x="8820150" y="3476625"/>
+            <a:off x="8820150" y="4110637"/>
             <a:ext cx="2381250" cy="161925"/>
           </a:xfrm>
           <a:prstGeom prst="rect"/>
@@ -3938,7 +3938,7 @@
         </p:nvSpPr>
         <p:spPr>
           <a:xfrm rot="0" flipH="0" flipV="0">
-            <a:off x="6610350" y="3724275"/>
+            <a:off x="6610350" y="4358287"/>
             <a:ext cx="1809750" cy="180975"/>
           </a:xfrm>
           <a:prstGeom prst="rect"/>
@@ -3987,7 +3987,7 @@
         </p:blipFill>
         <p:spPr>
           <a:xfrm rot="0" flipH="0" flipV="0">
-            <a:off x="8534400" y="3733800"/>
+            <a:off x="8534400" y="4367812"/>
             <a:ext cx="171450" cy="171450"/>
           </a:xfrm>
           <a:prstGeom prst="rect">
@@ -4004,7 +4004,7 @@
         </p:nvSpPr>
         <p:spPr>
           <a:xfrm rot="0" flipH="0" flipV="0">
-            <a:off x="8820150" y="3733800"/>
+            <a:off x="8820150" y="4367812"/>
             <a:ext cx="2381250" cy="161925"/>
           </a:xfrm>
           <a:prstGeom prst="rect"/>
@@ -4069,7 +4069,7 @@
         </p:nvSpPr>
         <p:spPr>
           <a:xfrm rot="0" flipH="0" flipV="0">
-            <a:off x="6419850" y="4171950"/>
+            <a:off x="6419850" y="4805962"/>
             <a:ext cx="5010150" cy="552450"/>
           </a:xfrm>
           <a:custGeom>
@@ -4109,7 +4109,7 @@
         </p:nvSpPr>
         <p:spPr>
           <a:xfrm rot="0" flipH="0" flipV="0">
-            <a:off x="6591300" y="4171950"/>
+            <a:off x="6591300" y="4805962"/>
             <a:ext cx="4800600" cy="552450"/>
           </a:xfrm>
           <a:prstGeom prst="rect"/>
@@ -9269,8 +9269,8 @@
         </p:nvSpPr>
         <p:spPr>
           <a:xfrm rot="0" flipH="0" flipV="0">
-            <a:off x="800100" y="1123950"/>
-            <a:ext cx="2505075" cy="4181475"/>
+            <a:off x="800100" y="1464713"/>
+            <a:ext cx="2505075" cy="3577350"/>
           </a:xfrm>
           <a:prstGeom prst="roundRect">
             <a:avLst>
@@ -9295,8 +9295,8 @@
         </p:nvSpPr>
         <p:spPr>
           <a:xfrm rot="0" flipH="0" flipV="0">
-            <a:off x="800100" y="1123950"/>
-            <a:ext cx="2505075" cy="4181475"/>
+            <a:off x="800100" y="1464713"/>
+            <a:ext cx="2505075" cy="3577350"/>
           </a:xfrm>
           <a:custGeom>
             <a:pathLst>
@@ -9352,7 +9352,7 @@
         </p:nvSpPr>
         <p:spPr>
           <a:xfrm rot="0" flipH="0" flipV="0">
-            <a:off x="971550" y="1276350"/>
+            <a:off x="971550" y="1617113"/>
             <a:ext cx="2162175" cy="161925"/>
           </a:xfrm>
           <a:prstGeom prst="rect"/>
@@ -9387,7 +9387,7 @@
         </p:nvSpPr>
         <p:spPr>
           <a:xfrm rot="0" flipH="0" flipV="0">
-            <a:off x="971550" y="1457325"/>
+            <a:off x="971550" y="1798088"/>
             <a:ext cx="2162175" cy="209550"/>
           </a:xfrm>
           <a:prstGeom prst="rect"/>
@@ -9422,7 +9422,7 @@
         </p:nvSpPr>
         <p:spPr>
           <a:xfrm rot="0" flipH="0" flipV="0">
-            <a:off x="971550" y="1685925"/>
+            <a:off x="971550" y="2026688"/>
             <a:ext cx="457200" cy="190500"/>
           </a:xfrm>
           <a:prstGeom prst="rect"/>
@@ -9457,7 +9457,7 @@
         </p:nvSpPr>
         <p:spPr>
           <a:xfrm rot="0" flipH="0" flipV="0">
-            <a:off x="1504950" y="1685925"/>
+            <a:off x="1504950" y="2026688"/>
             <a:ext cx="571500" cy="190500"/>
           </a:xfrm>
           <a:prstGeom prst="rect"/>
@@ -9506,7 +9506,7 @@
         </p:blipFill>
         <p:spPr>
           <a:xfrm rot="0" flipH="0" flipV="0">
-            <a:off x="1009650" y="2686050"/>
+            <a:off x="1009650" y="2433188"/>
             <a:ext cx="2095500" cy="952500"/>
           </a:xfrm>
           <a:prstGeom prst="rect">
@@ -9523,7 +9523,7 @@
         </p:nvSpPr>
         <p:spPr>
           <a:xfrm rot="0" flipH="0" flipV="0">
-            <a:off x="971550" y="4448175"/>
+            <a:off x="971550" y="4195313"/>
             <a:ext cx="2162175" cy="466725"/>
           </a:xfrm>
           <a:prstGeom prst="rect"/>
@@ -9560,7 +9560,7 @@
         </p:nvSpPr>
         <p:spPr>
           <a:xfrm rot="0" flipH="0" flipV="0">
-            <a:off x="971550" y="4972050"/>
+            <a:off x="971550" y="4719188"/>
             <a:ext cx="2162175" cy="142875"/>
           </a:xfrm>
           <a:prstGeom prst="rect"/>
@@ -9595,8 +9595,8 @@
         </p:nvSpPr>
         <p:spPr>
           <a:xfrm rot="0" flipH="0" flipV="0">
-            <a:off x="3495675" y="1123950"/>
-            <a:ext cx="2505075" cy="4181475"/>
+            <a:off x="3495675" y="1464713"/>
+            <a:ext cx="2505075" cy="3577350"/>
           </a:xfrm>
           <a:prstGeom prst="roundRect">
             <a:avLst>
@@ -9621,8 +9621,8 @@
         </p:nvSpPr>
         <p:spPr>
           <a:xfrm rot="0" flipH="0" flipV="0">
-            <a:off x="3495675" y="1123950"/>
-            <a:ext cx="2505075" cy="4181475"/>
+            <a:off x="3495675" y="1464713"/>
+            <a:ext cx="2505075" cy="3577350"/>
           </a:xfrm>
           <a:custGeom>
             <a:pathLst>
@@ -9678,7 +9678,7 @@
         </p:nvSpPr>
         <p:spPr>
           <a:xfrm rot="0" flipH="0" flipV="0">
-            <a:off x="3667125" y="1276350"/>
+            <a:off x="3667125" y="1617113"/>
             <a:ext cx="2162175" cy="161925"/>
           </a:xfrm>
           <a:prstGeom prst="rect"/>
@@ -9713,7 +9713,7 @@
         </p:nvSpPr>
         <p:spPr>
           <a:xfrm rot="0" flipH="0" flipV="0">
-            <a:off x="3667125" y="1457325"/>
+            <a:off x="3667125" y="1798088"/>
             <a:ext cx="2162175" cy="209550"/>
           </a:xfrm>
           <a:prstGeom prst="rect"/>
@@ -9748,7 +9748,7 @@
         </p:nvSpPr>
         <p:spPr>
           <a:xfrm rot="0" flipH="0" flipV="0">
-            <a:off x="3667125" y="1685925"/>
+            <a:off x="3667125" y="2026688"/>
             <a:ext cx="457200" cy="190500"/>
           </a:xfrm>
           <a:prstGeom prst="rect"/>
@@ -9783,7 +9783,7 @@
         </p:nvSpPr>
         <p:spPr>
           <a:xfrm rot="0" flipH="0" flipV="0">
-            <a:off x="4200525" y="1685925"/>
+            <a:off x="4200525" y="2026688"/>
             <a:ext cx="657225" cy="190500"/>
           </a:xfrm>
           <a:prstGeom prst="rect"/>
@@ -9832,7 +9832,7 @@
         </p:blipFill>
         <p:spPr>
           <a:xfrm rot="0" flipH="0" flipV="0">
-            <a:off x="3705225" y="2686050"/>
+            <a:off x="3705225" y="2433188"/>
             <a:ext cx="2095500" cy="952500"/>
           </a:xfrm>
           <a:prstGeom prst="rect">
@@ -9849,7 +9849,7 @@
         </p:nvSpPr>
         <p:spPr>
           <a:xfrm rot="0" flipH="0" flipV="0">
-            <a:off x="3667125" y="4448175"/>
+            <a:off x="3667125" y="4195313"/>
             <a:ext cx="2162175" cy="466725"/>
           </a:xfrm>
           <a:prstGeom prst="rect"/>
@@ -9886,7 +9886,7 @@
         </p:nvSpPr>
         <p:spPr>
           <a:xfrm rot="0" flipH="0" flipV="0">
-            <a:off x="3667125" y="4972050"/>
+            <a:off x="3667125" y="4719188"/>
             <a:ext cx="2162175" cy="142875"/>
           </a:xfrm>
           <a:prstGeom prst="rect"/>
@@ -9921,8 +9921,8 @@
         </p:nvSpPr>
         <p:spPr>
           <a:xfrm rot="0" flipH="0" flipV="0">
-            <a:off x="6191250" y="1123950"/>
-            <a:ext cx="2505075" cy="4181475"/>
+            <a:off x="6191250" y="1464713"/>
+            <a:ext cx="2505075" cy="3577350"/>
           </a:xfrm>
           <a:prstGeom prst="roundRect">
             <a:avLst>
@@ -9947,8 +9947,8 @@
         </p:nvSpPr>
         <p:spPr>
           <a:xfrm rot="0" flipH="0" flipV="0">
-            <a:off x="6191250" y="1123950"/>
-            <a:ext cx="2505075" cy="4181475"/>
+            <a:off x="6191250" y="1464713"/>
+            <a:ext cx="2505075" cy="3577350"/>
           </a:xfrm>
           <a:custGeom>
             <a:pathLst>
@@ -10004,7 +10004,7 @@
         </p:nvSpPr>
         <p:spPr>
           <a:xfrm rot="0" flipH="0" flipV="0">
-            <a:off x="6362700" y="1276350"/>
+            <a:off x="6362700" y="1617113"/>
             <a:ext cx="2162175" cy="161925"/>
           </a:xfrm>
           <a:prstGeom prst="rect"/>
@@ -10039,7 +10039,7 @@
         </p:nvSpPr>
         <p:spPr>
           <a:xfrm rot="0" flipH="0" flipV="0">
-            <a:off x="6362700" y="1457325"/>
+            <a:off x="6362700" y="1798088"/>
             <a:ext cx="2162175" cy="209550"/>
           </a:xfrm>
           <a:prstGeom prst="rect"/>
@@ -10074,7 +10074,7 @@
         </p:nvSpPr>
         <p:spPr>
           <a:xfrm rot="0" flipH="0" flipV="0">
-            <a:off x="6362700" y="1685925"/>
+            <a:off x="6362700" y="2026688"/>
             <a:ext cx="457200" cy="190500"/>
           </a:xfrm>
           <a:prstGeom prst="rect"/>
@@ -10109,7 +10109,7 @@
         </p:nvSpPr>
         <p:spPr>
           <a:xfrm rot="0" flipH="0" flipV="0">
-            <a:off x="6896100" y="1685925"/>
+            <a:off x="6896100" y="2026688"/>
             <a:ext cx="542925" cy="190500"/>
           </a:xfrm>
           <a:prstGeom prst="rect"/>
@@ -10158,7 +10158,7 @@
         </p:blipFill>
         <p:spPr>
           <a:xfrm rot="0" flipH="0" flipV="0">
-            <a:off x="6400800" y="2686050"/>
+            <a:off x="6400800" y="2433188"/>
             <a:ext cx="2095500" cy="952500"/>
           </a:xfrm>
           <a:prstGeom prst="rect">
@@ -10175,7 +10175,7 @@
         </p:nvSpPr>
         <p:spPr>
           <a:xfrm rot="0" flipH="0" flipV="0">
-            <a:off x="6362700" y="4448175"/>
+            <a:off x="6362700" y="4195313"/>
             <a:ext cx="2162175" cy="466725"/>
           </a:xfrm>
           <a:prstGeom prst="rect"/>
@@ -10212,7 +10212,7 @@
         </p:nvSpPr>
         <p:spPr>
           <a:xfrm rot="0" flipH="0" flipV="0">
-            <a:off x="6362700" y="4972050"/>
+            <a:off x="6362700" y="4719188"/>
             <a:ext cx="2162175" cy="142875"/>
           </a:xfrm>
           <a:prstGeom prst="rect"/>
@@ -10247,8 +10247,8 @@
         </p:nvSpPr>
         <p:spPr>
           <a:xfrm rot="0" flipH="0" flipV="0">
-            <a:off x="8886825" y="1123950"/>
-            <a:ext cx="2505075" cy="4181475"/>
+            <a:off x="8886825" y="1464713"/>
+            <a:ext cx="2505075" cy="3577350"/>
           </a:xfrm>
           <a:prstGeom prst="roundRect">
             <a:avLst>
@@ -10273,8 +10273,8 @@
         </p:nvSpPr>
         <p:spPr>
           <a:xfrm rot="0" flipH="0" flipV="0">
-            <a:off x="8886825" y="1123950"/>
-            <a:ext cx="2505075" cy="4181475"/>
+            <a:off x="8886825" y="1464713"/>
+            <a:ext cx="2505075" cy="3577350"/>
           </a:xfrm>
           <a:custGeom>
             <a:pathLst>
@@ -10330,7 +10330,7 @@
         </p:nvSpPr>
         <p:spPr>
           <a:xfrm rot="0" flipH="0" flipV="0">
-            <a:off x="9058275" y="1276350"/>
+            <a:off x="9058275" y="1617113"/>
             <a:ext cx="2162175" cy="161925"/>
           </a:xfrm>
           <a:prstGeom prst="rect"/>
@@ -10365,7 +10365,7 @@
         </p:nvSpPr>
         <p:spPr>
           <a:xfrm rot="0" flipH="0" flipV="0">
-            <a:off x="9058275" y="1457325"/>
+            <a:off x="9058275" y="1798088"/>
             <a:ext cx="2162175" cy="209550"/>
           </a:xfrm>
           <a:prstGeom prst="rect"/>
@@ -10400,7 +10400,7 @@
         </p:nvSpPr>
         <p:spPr>
           <a:xfrm rot="0" flipH="0" flipV="0">
-            <a:off x="9058275" y="1685925"/>
+            <a:off x="9058275" y="2026688"/>
             <a:ext cx="457200" cy="190500"/>
           </a:xfrm>
           <a:prstGeom prst="rect"/>
@@ -10435,7 +10435,7 @@
         </p:nvSpPr>
         <p:spPr>
           <a:xfrm rot="0" flipH="0" flipV="0">
-            <a:off x="9591675" y="1685925"/>
+            <a:off x="9591675" y="2026688"/>
             <a:ext cx="504825" cy="190500"/>
           </a:xfrm>
           <a:prstGeom prst="rect"/>
@@ -10484,7 +10484,7 @@
         </p:blipFill>
         <p:spPr>
           <a:xfrm rot="0" flipH="0" flipV="0">
-            <a:off x="9096375" y="2686050"/>
+            <a:off x="9096375" y="2433188"/>
             <a:ext cx="2095500" cy="952500"/>
           </a:xfrm>
           <a:prstGeom prst="rect">
@@ -10501,7 +10501,7 @@
         </p:nvSpPr>
         <p:spPr>
           <a:xfrm rot="0" flipH="0" flipV="0">
-            <a:off x="9058275" y="4448175"/>
+            <a:off x="9058275" y="4195313"/>
             <a:ext cx="2162175" cy="466725"/>
           </a:xfrm>
           <a:prstGeom prst="rect"/>
@@ -10538,7 +10538,7 @@
         </p:nvSpPr>
         <p:spPr>
           <a:xfrm rot="0" flipH="0" flipV="0">
-            <a:off x="9058275" y="4972050"/>
+            <a:off x="9058275" y="4719188"/>
             <a:ext cx="2162175" cy="142875"/>
           </a:xfrm>
           <a:prstGeom prst="rect"/>
@@ -10573,7 +10573,7 @@
         </p:nvSpPr>
         <p:spPr>
           <a:xfrm rot="0" flipH="0" flipV="0">
-            <a:off x="800100" y="5419725"/>
+            <a:off x="800100" y="5156362"/>
             <a:ext cx="10591800" cy="542925"/>
           </a:xfrm>
           <a:prstGeom prst="roundRect">
@@ -10604,7 +10604,7 @@
         </p:nvSpPr>
         <p:spPr>
           <a:xfrm rot="0" flipH="0" flipV="0">
-            <a:off x="990600" y="5543550"/>
+            <a:off x="990600" y="5280187"/>
             <a:ext cx="10210800" cy="295275"/>
           </a:xfrm>
           <a:prstGeom prst="rect"/>
@@ -12987,8 +12987,8 @@
         </p:nvSpPr>
         <p:spPr>
           <a:xfrm rot="0" flipH="0" flipV="0">
-            <a:off x="800100" y="1123950"/>
-            <a:ext cx="2009775" cy="4210050"/>
+            <a:off x="800100" y="2136225"/>
+            <a:ext cx="2009775" cy="2262900"/>
           </a:xfrm>
           <a:prstGeom prst="roundRect">
             <a:avLst>
@@ -13013,8 +13013,8 @@
         </p:nvSpPr>
         <p:spPr>
           <a:xfrm rot="0" flipH="0" flipV="0">
-            <a:off x="800100" y="1123950"/>
-            <a:ext cx="2009775" cy="4210050"/>
+            <a:off x="800100" y="2136225"/>
+            <a:ext cx="2009775" cy="2262900"/>
           </a:xfrm>
           <a:custGeom>
             <a:pathLst>
@@ -13070,7 +13070,7 @@
         </p:nvSpPr>
         <p:spPr>
           <a:xfrm rot="0" flipH="0" flipV="0">
-            <a:off x="933450" y="1257300"/>
+            <a:off x="933450" y="2269575"/>
             <a:ext cx="285750" cy="285750"/>
           </a:xfrm>
           <a:prstGeom prst="roundRect">
@@ -13096,7 +13096,7 @@
         </p:nvSpPr>
         <p:spPr>
           <a:xfrm rot="0" flipH="0" flipV="0">
-            <a:off x="1047750" y="1314450"/>
+            <a:off x="1047750" y="2326725"/>
             <a:ext cx="66675" cy="171450"/>
           </a:xfrm>
           <a:prstGeom prst="rect"/>
@@ -13131,7 +13131,7 @@
         </p:nvSpPr>
         <p:spPr>
           <a:xfrm rot="0" flipH="0" flipV="0">
-            <a:off x="933450" y="1619250"/>
+            <a:off x="933450" y="2631525"/>
             <a:ext cx="1743075" cy="209550"/>
           </a:xfrm>
           <a:prstGeom prst="rect"/>
@@ -13166,7 +13166,7 @@
         </p:nvSpPr>
         <p:spPr>
           <a:xfrm rot="0" flipH="0" flipV="0">
-            <a:off x="933450" y="1857375"/>
+            <a:off x="933450" y="2869650"/>
             <a:ext cx="1743075" cy="142875"/>
           </a:xfrm>
           <a:prstGeom prst="rect"/>
@@ -13201,7 +13201,7 @@
         </p:nvSpPr>
         <p:spPr>
           <a:xfrm rot="0" flipH="0" flipV="0">
-            <a:off x="933450" y="4314825"/>
+            <a:off x="933450" y="3371400"/>
             <a:ext cx="1743075" cy="847725"/>
           </a:xfrm>
           <a:prstGeom prst="roundRect">
@@ -13227,7 +13227,7 @@
         </p:nvSpPr>
         <p:spPr>
           <a:xfrm rot="0" flipH="0" flipV="0">
-            <a:off x="1038225" y="4400550"/>
+            <a:off x="1038225" y="3457125"/>
             <a:ext cx="1533525" cy="676275"/>
           </a:xfrm>
           <a:prstGeom prst="rect"/>
@@ -13384,8 +13384,8 @@
         </p:nvSpPr>
         <p:spPr>
           <a:xfrm rot="0" flipH="0" flipV="0">
-            <a:off x="2943225" y="1123950"/>
-            <a:ext cx="2009775" cy="4210050"/>
+            <a:off x="2943225" y="2136225"/>
+            <a:ext cx="2009775" cy="2262900"/>
           </a:xfrm>
           <a:prstGeom prst="roundRect">
             <a:avLst>
@@ -13410,8 +13410,8 @@
         </p:nvSpPr>
         <p:spPr>
           <a:xfrm rot="0" flipH="0" flipV="0">
-            <a:off x="2943225" y="1123950"/>
-            <a:ext cx="2009775" cy="4210050"/>
+            <a:off x="2943225" y="2136225"/>
+            <a:ext cx="2009775" cy="2262900"/>
           </a:xfrm>
           <a:custGeom>
             <a:pathLst>
@@ -13467,7 +13467,7 @@
         </p:nvSpPr>
         <p:spPr>
           <a:xfrm rot="0" flipH="0" flipV="0">
-            <a:off x="3076575" y="1257300"/>
+            <a:off x="3076575" y="2269575"/>
             <a:ext cx="285750" cy="285750"/>
           </a:xfrm>
           <a:prstGeom prst="roundRect">
@@ -13493,7 +13493,7 @@
         </p:nvSpPr>
         <p:spPr>
           <a:xfrm rot="0" flipH="0" flipV="0">
-            <a:off x="3181350" y="1314450"/>
+            <a:off x="3181350" y="2326725"/>
             <a:ext cx="85725" cy="171450"/>
           </a:xfrm>
           <a:prstGeom prst="rect"/>
@@ -13528,7 +13528,7 @@
         </p:nvSpPr>
         <p:spPr>
           <a:xfrm rot="0" flipH="0" flipV="0">
-            <a:off x="3076575" y="1619250"/>
+            <a:off x="3076575" y="2631525"/>
             <a:ext cx="1743075" cy="209550"/>
           </a:xfrm>
           <a:prstGeom prst="rect"/>
@@ -13563,7 +13563,7 @@
         </p:nvSpPr>
         <p:spPr>
           <a:xfrm rot="0" flipH="0" flipV="0">
-            <a:off x="3076575" y="1857375"/>
+            <a:off x="3076575" y="2869650"/>
             <a:ext cx="1743075" cy="142875"/>
           </a:xfrm>
           <a:prstGeom prst="rect"/>
@@ -13598,7 +13598,7 @@
         </p:nvSpPr>
         <p:spPr>
           <a:xfrm rot="0" flipH="0" flipV="0">
-            <a:off x="3076575" y="4314825"/>
+            <a:off x="3076575" y="3371400"/>
             <a:ext cx="1743075" cy="847725"/>
           </a:xfrm>
           <a:prstGeom prst="roundRect">
@@ -13624,7 +13624,7 @@
         </p:nvSpPr>
         <p:spPr>
           <a:xfrm rot="0" flipH="0" flipV="0">
-            <a:off x="3181350" y="4400550"/>
+            <a:off x="3181350" y="3457125"/>
             <a:ext cx="1533525" cy="676275"/>
           </a:xfrm>
           <a:prstGeom prst="rect"/>
@@ -13701,8 +13701,8 @@
         </p:nvSpPr>
         <p:spPr>
           <a:xfrm rot="0" flipH="0" flipV="0">
-            <a:off x="5086350" y="1123950"/>
-            <a:ext cx="2019300" cy="4210050"/>
+            <a:off x="5086350" y="2136225"/>
+            <a:ext cx="2019300" cy="2262900"/>
           </a:xfrm>
           <a:prstGeom prst="roundRect">
             <a:avLst>
@@ -13727,8 +13727,8 @@
         </p:nvSpPr>
         <p:spPr>
           <a:xfrm rot="0" flipH="0" flipV="0">
-            <a:off x="5086350" y="1123950"/>
-            <a:ext cx="2019300" cy="4210050"/>
+            <a:off x="5086350" y="2136225"/>
+            <a:ext cx="2019300" cy="2262900"/>
           </a:xfrm>
           <a:custGeom>
             <a:pathLst>
@@ -13784,7 +13784,7 @@
         </p:nvSpPr>
         <p:spPr>
           <a:xfrm rot="0" flipH="0" flipV="0">
-            <a:off x="5219700" y="1257300"/>
+            <a:off x="5219700" y="2269575"/>
             <a:ext cx="285750" cy="285750"/>
           </a:xfrm>
           <a:prstGeom prst="roundRect">
@@ -13810,7 +13810,7 @@
         </p:nvSpPr>
         <p:spPr>
           <a:xfrm rot="0" flipH="0" flipV="0">
-            <a:off x="5324475" y="1314450"/>
+            <a:off x="5324475" y="2326725"/>
             <a:ext cx="85725" cy="171450"/>
           </a:xfrm>
           <a:prstGeom prst="rect"/>
@@ -13845,7 +13845,7 @@
         </p:nvSpPr>
         <p:spPr>
           <a:xfrm rot="0" flipH="0" flipV="0">
-            <a:off x="5219700" y="1619250"/>
+            <a:off x="5219700" y="2631525"/>
             <a:ext cx="1752600" cy="209550"/>
           </a:xfrm>
           <a:prstGeom prst="rect"/>
@@ -13880,7 +13880,7 @@
         </p:nvSpPr>
         <p:spPr>
           <a:xfrm rot="0" flipH="0" flipV="0">
-            <a:off x="5219700" y="1857375"/>
+            <a:off x="5219700" y="2869650"/>
             <a:ext cx="1752600" cy="285750"/>
           </a:xfrm>
           <a:prstGeom prst="rect"/>
@@ -13917,7 +13917,7 @@
         </p:nvSpPr>
         <p:spPr>
           <a:xfrm rot="0" flipH="0" flipV="0">
-            <a:off x="5219700" y="4314825"/>
+            <a:off x="5219700" y="3371400"/>
             <a:ext cx="1752600" cy="847725"/>
           </a:xfrm>
           <a:prstGeom prst="roundRect">
@@ -13943,7 +13943,7 @@
         </p:nvSpPr>
         <p:spPr>
           <a:xfrm rot="0" flipH="0" flipV="0">
-            <a:off x="5324475" y="4400550"/>
+            <a:off x="5324475" y="3457125"/>
             <a:ext cx="1543050" cy="676275"/>
           </a:xfrm>
           <a:prstGeom prst="rect"/>
@@ -14020,8 +14020,8 @@
         </p:nvSpPr>
         <p:spPr>
           <a:xfrm rot="0" flipH="0" flipV="0">
-            <a:off x="7239000" y="1123950"/>
-            <a:ext cx="2009775" cy="4210050"/>
+            <a:off x="7239000" y="2136225"/>
+            <a:ext cx="2009775" cy="2262900"/>
           </a:xfrm>
           <a:prstGeom prst="roundRect">
             <a:avLst>
@@ -14046,8 +14046,8 @@
         </p:nvSpPr>
         <p:spPr>
           <a:xfrm rot="0" flipH="0" flipV="0">
-            <a:off x="7239000" y="1123950"/>
-            <a:ext cx="2009775" cy="4210050"/>
+            <a:off x="7239000" y="2136225"/>
+            <a:ext cx="2009775" cy="2262900"/>
           </a:xfrm>
           <a:custGeom>
             <a:pathLst>
@@ -14103,7 +14103,7 @@
         </p:nvSpPr>
         <p:spPr>
           <a:xfrm rot="0" flipH="0" flipV="0">
-            <a:off x="7372350" y="1257300"/>
+            <a:off x="7372350" y="2269575"/>
             <a:ext cx="285750" cy="285750"/>
           </a:xfrm>
           <a:prstGeom prst="roundRect">
@@ -14129,7 +14129,7 @@
         </p:nvSpPr>
         <p:spPr>
           <a:xfrm rot="0" flipH="0" flipV="0">
-            <a:off x="7477125" y="1314450"/>
+            <a:off x="7477125" y="2326725"/>
             <a:ext cx="85725" cy="171450"/>
           </a:xfrm>
           <a:prstGeom prst="rect"/>
@@ -14164,7 +14164,7 @@
         </p:nvSpPr>
         <p:spPr>
           <a:xfrm rot="0" flipH="0" flipV="0">
-            <a:off x="7372350" y="1619250"/>
+            <a:off x="7372350" y="2631525"/>
             <a:ext cx="1743075" cy="209550"/>
           </a:xfrm>
           <a:prstGeom prst="rect"/>
@@ -14199,7 +14199,7 @@
         </p:nvSpPr>
         <p:spPr>
           <a:xfrm rot="0" flipH="0" flipV="0">
-            <a:off x="7372350" y="1857375"/>
+            <a:off x="7372350" y="2869650"/>
             <a:ext cx="1743075" cy="142875"/>
           </a:xfrm>
           <a:prstGeom prst="rect"/>
@@ -14234,7 +14234,7 @@
         </p:nvSpPr>
         <p:spPr>
           <a:xfrm rot="0" flipH="0" flipV="0">
-            <a:off x="7372350" y="4314825"/>
+            <a:off x="7372350" y="3371400"/>
             <a:ext cx="1743075" cy="847725"/>
           </a:xfrm>
           <a:prstGeom prst="roundRect">
@@ -14260,7 +14260,7 @@
         </p:nvSpPr>
         <p:spPr>
           <a:xfrm rot="0" flipH="0" flipV="0">
-            <a:off x="7477125" y="4400550"/>
+            <a:off x="7477125" y="3457125"/>
             <a:ext cx="1533525" cy="676275"/>
           </a:xfrm>
           <a:prstGeom prst="rect"/>
@@ -14337,8 +14337,8 @@
         </p:nvSpPr>
         <p:spPr>
           <a:xfrm rot="0" flipH="0" flipV="0">
-            <a:off x="9382125" y="1123950"/>
-            <a:ext cx="2009775" cy="4210050"/>
+            <a:off x="9382125" y="2136225"/>
+            <a:ext cx="2009775" cy="2262900"/>
           </a:xfrm>
           <a:prstGeom prst="roundRect">
             <a:avLst>
@@ -14363,8 +14363,8 @@
         </p:nvSpPr>
         <p:spPr>
           <a:xfrm rot="0" flipH="0" flipV="0">
-            <a:off x="9382125" y="1123950"/>
-            <a:ext cx="2009775" cy="4210050"/>
+            <a:off x="9382125" y="2136225"/>
+            <a:ext cx="2009775" cy="2262900"/>
           </a:xfrm>
           <a:custGeom>
             <a:pathLst>
@@ -14420,7 +14420,7 @@
         </p:nvSpPr>
         <p:spPr>
           <a:xfrm rot="0" flipH="0" flipV="0">
-            <a:off x="9515475" y="1257300"/>
+            <a:off x="9515475" y="2269575"/>
             <a:ext cx="285750" cy="285750"/>
           </a:xfrm>
           <a:prstGeom prst="roundRect">
@@ -14446,7 +14446,7 @@
         </p:nvSpPr>
         <p:spPr>
           <a:xfrm rot="0" flipH="0" flipV="0">
-            <a:off x="9620250" y="1314450"/>
+            <a:off x="9620250" y="2326725"/>
             <a:ext cx="85725" cy="171450"/>
           </a:xfrm>
           <a:prstGeom prst="rect"/>
@@ -14481,7 +14481,7 @@
         </p:nvSpPr>
         <p:spPr>
           <a:xfrm rot="0" flipH="0" flipV="0">
-            <a:off x="9515475" y="1619250"/>
+            <a:off x="9515475" y="2631525"/>
             <a:ext cx="1743075" cy="209550"/>
           </a:xfrm>
           <a:prstGeom prst="rect"/>
@@ -14516,7 +14516,7 @@
         </p:nvSpPr>
         <p:spPr>
           <a:xfrm rot="0" flipH="0" flipV="0">
-            <a:off x="9515475" y="1857375"/>
+            <a:off x="9515475" y="2869650"/>
             <a:ext cx="1743075" cy="142875"/>
           </a:xfrm>
           <a:prstGeom prst="rect"/>
@@ -14571,7 +14571,7 @@
         </p:nvSpPr>
         <p:spPr>
           <a:xfrm rot="0" flipH="0" flipV="0">
-            <a:off x="9515475" y="4314825"/>
+            <a:off x="9515475" y="3371400"/>
             <a:ext cx="1743075" cy="847725"/>
           </a:xfrm>
           <a:prstGeom prst="roundRect">
@@ -14597,7 +14597,7 @@
         </p:nvSpPr>
         <p:spPr>
           <a:xfrm rot="0" flipH="0" flipV="0">
-            <a:off x="9620250" y="4400550"/>
+            <a:off x="9620250" y="3457125"/>
             <a:ext cx="1533525" cy="676275"/>
           </a:xfrm>
           <a:prstGeom prst="rect"/>
@@ -14694,7 +14694,7 @@
         </p:nvSpPr>
         <p:spPr>
           <a:xfrm rot="0" flipH="0" flipV="0">
-            <a:off x="800100" y="5429250"/>
+            <a:off x="800100" y="4494375"/>
             <a:ext cx="6838950" cy="533400"/>
           </a:xfrm>
           <a:prstGeom prst="roundRect">
@@ -14725,7 +14725,7 @@
         </p:nvSpPr>
         <p:spPr>
           <a:xfrm rot="0" flipH="0" flipV="0">
-            <a:off x="990600" y="5553075"/>
+            <a:off x="990600" y="4618200"/>
             <a:ext cx="6457950" cy="285750"/>
           </a:xfrm>
           <a:prstGeom prst="rect"/>
@@ -14810,7 +14810,7 @@
         </p:nvSpPr>
         <p:spPr>
           <a:xfrm rot="0" flipH="0" flipV="0">
-            <a:off x="7772400" y="5429250"/>
+            <a:off x="7772400" y="4494375"/>
             <a:ext cx="3619500" cy="533400"/>
           </a:xfrm>
           <a:custGeom>
@@ -14850,7 +14850,7 @@
         </p:nvSpPr>
         <p:spPr>
           <a:xfrm rot="0" flipH="0" flipV="0">
-            <a:off x="7943850" y="5438775"/>
+            <a:off x="7943850" y="4503900"/>
             <a:ext cx="3448050" cy="514350"/>
           </a:xfrm>
           <a:prstGeom prst="rect"/>
@@ -16278,7 +16278,7 @@
         </p:nvSpPr>
         <p:spPr>
           <a:xfrm rot="0" flipH="0" flipV="0">
-            <a:off x="933450" y="3657600"/>
+            <a:off x="933450" y="3448050"/>
             <a:ext cx="1400175" cy="314325"/>
           </a:xfrm>
           <a:prstGeom prst="rect"/>
@@ -16499,7 +16499,7 @@
         </p:nvSpPr>
         <p:spPr>
           <a:xfrm rot="0" flipH="0" flipV="0">
-            <a:off x="2714625" y="3362325"/>
+            <a:off x="2714625" y="3209925"/>
             <a:ext cx="1409700" cy="228600"/>
           </a:xfrm>
           <a:prstGeom prst="rect"/>
@@ -16534,7 +16534,7 @@
         </p:nvSpPr>
         <p:spPr>
           <a:xfrm rot="0" flipH="0" flipV="0">
-            <a:off x="2714625" y="3600450"/>
+            <a:off x="2714625" y="3448050"/>
             <a:ext cx="1409700" cy="152400"/>
           </a:xfrm>
           <a:prstGeom prst="rect"/>
@@ -16788,7 +16788,7 @@
         </p:nvSpPr>
         <p:spPr>
           <a:xfrm rot="0" flipH="0" flipV="0">
-            <a:off x="4505325" y="3362325"/>
+            <a:off x="4505325" y="3209925"/>
             <a:ext cx="1400175" cy="228600"/>
           </a:xfrm>
           <a:prstGeom prst="rect"/>
@@ -16823,7 +16823,7 @@
         </p:nvSpPr>
         <p:spPr>
           <a:xfrm rot="0" flipH="0" flipV="0">
-            <a:off x="4505325" y="3600450"/>
+            <a:off x="4505325" y="3448050"/>
             <a:ext cx="1400175" cy="152400"/>
           </a:xfrm>
           <a:prstGeom prst="rect"/>
@@ -17047,7 +17047,7 @@
         </p:nvSpPr>
         <p:spPr>
           <a:xfrm rot="0" flipH="0" flipV="0">
-            <a:off x="6286500" y="3362325"/>
+            <a:off x="6286500" y="3209925"/>
             <a:ext cx="1400175" cy="228600"/>
           </a:xfrm>
           <a:prstGeom prst="rect"/>
@@ -17082,7 +17082,7 @@
         </p:nvSpPr>
         <p:spPr>
           <a:xfrm rot="0" flipH="0" flipV="0">
-            <a:off x="6286500" y="3600450"/>
+            <a:off x="6286500" y="3448050"/>
             <a:ext cx="1400175" cy="152400"/>
           </a:xfrm>
           <a:prstGeom prst="rect"/>
@@ -17296,7 +17296,7 @@
         </p:nvSpPr>
         <p:spPr>
           <a:xfrm rot="0" flipH="0" flipV="0">
-            <a:off x="8067675" y="3362325"/>
+            <a:off x="8067675" y="3209925"/>
             <a:ext cx="1409700" cy="228600"/>
           </a:xfrm>
           <a:prstGeom prst="rect"/>
@@ -17331,7 +17331,7 @@
         </p:nvSpPr>
         <p:spPr>
           <a:xfrm rot="0" flipH="0" flipV="0">
-            <a:off x="8067675" y="3600450"/>
+            <a:off x="8067675" y="3448050"/>
             <a:ext cx="1409700" cy="152400"/>
           </a:xfrm>
           <a:prstGeom prst="rect"/>
@@ -17585,7 +17585,7 @@
         </p:nvSpPr>
         <p:spPr>
           <a:xfrm rot="0" flipH="0" flipV="0">
-            <a:off x="9858375" y="3362325"/>
+            <a:off x="9858375" y="3209925"/>
             <a:ext cx="1400175" cy="228600"/>
           </a:xfrm>
           <a:prstGeom prst="rect"/>
@@ -17620,7 +17620,7 @@
         </p:nvSpPr>
         <p:spPr>
           <a:xfrm rot="0" flipH="0" flipV="0">
-            <a:off x="9858375" y="3600450"/>
+            <a:off x="9858375" y="3448050"/>
             <a:ext cx="1400175" cy="152400"/>
           </a:xfrm>
           <a:prstGeom prst="rect"/>
@@ -21586,8 +21586,8 @@
         </p:nvSpPr>
         <p:spPr>
           <a:xfrm rot="0" flipH="0" flipV="0">
-            <a:off x="800100" y="1123950"/>
-            <a:ext cx="3419475" cy="3905250"/>
+            <a:off x="800100" y="2283862"/>
+            <a:ext cx="3419475" cy="1662824"/>
           </a:xfrm>
           <a:prstGeom prst="roundRect">
             <a:avLst>
@@ -21612,8 +21612,8 @@
         </p:nvSpPr>
         <p:spPr>
           <a:xfrm rot="0" flipH="0" flipV="0">
-            <a:off x="800100" y="1123950"/>
-            <a:ext cx="3419475" cy="3905250"/>
+            <a:off x="800100" y="2283862"/>
+            <a:ext cx="3419475" cy="1662824"/>
           </a:xfrm>
           <a:custGeom>
             <a:pathLst>
@@ -21669,7 +21669,7 @@
         </p:nvSpPr>
         <p:spPr>
           <a:xfrm rot="0" flipH="0" flipV="0">
-            <a:off x="971550" y="1276350"/>
+            <a:off x="971550" y="2436262"/>
             <a:ext cx="361950" cy="361950"/>
           </a:xfrm>
           <a:prstGeom prst="roundRect">
@@ -21709,7 +21709,7 @@
         </p:blipFill>
         <p:spPr>
           <a:xfrm rot="0" flipH="0" flipV="0">
-            <a:off x="1066800" y="1371600"/>
+            <a:off x="1066800" y="2531512"/>
             <a:ext cx="180975" cy="180975"/>
           </a:xfrm>
           <a:prstGeom prst="rect">
@@ -21726,7 +21726,7 @@
         </p:nvSpPr>
         <p:spPr>
           <a:xfrm rot="0" flipH="0" flipV="0">
-            <a:off x="1428750" y="1285875"/>
+            <a:off x="1428750" y="2445787"/>
             <a:ext cx="1009650" cy="209550"/>
           </a:xfrm>
           <a:prstGeom prst="rect"/>
@@ -21771,7 +21771,7 @@
         </p:nvSpPr>
         <p:spPr>
           <a:xfrm rot="0" flipH="0" flipV="0">
-            <a:off x="1428750" y="1495425"/>
+            <a:off x="1428750" y="2655337"/>
             <a:ext cx="1009650" cy="142875"/>
           </a:xfrm>
           <a:prstGeom prst="rect"/>
@@ -21806,7 +21806,7 @@
         </p:nvSpPr>
         <p:spPr>
           <a:xfrm rot="0" flipH="0" flipV="0">
-            <a:off x="971550" y="1733550"/>
+            <a:off x="971550" y="2893462"/>
             <a:ext cx="3076575" cy="514350"/>
           </a:xfrm>
           <a:prstGeom prst="rect"/>
@@ -21883,7 +21883,7 @@
         </p:nvSpPr>
         <p:spPr>
           <a:xfrm rot="0" flipH="0" flipV="0">
-            <a:off x="971550" y="4695825"/>
+            <a:off x="971550" y="3623812"/>
             <a:ext cx="3076575" cy="142875"/>
           </a:xfrm>
           <a:prstGeom prst="rect"/>
@@ -21918,8 +21918,8 @@
         </p:nvSpPr>
         <p:spPr>
           <a:xfrm rot="0" flipH="0" flipV="0">
-            <a:off x="4391025" y="1123950"/>
-            <a:ext cx="3409950" cy="3905250"/>
+            <a:off x="4391025" y="2283862"/>
+            <a:ext cx="3409950" cy="1662824"/>
           </a:xfrm>
           <a:prstGeom prst="roundRect">
             <a:avLst>
@@ -21944,8 +21944,8 @@
         </p:nvSpPr>
         <p:spPr>
           <a:xfrm rot="0" flipH="0" flipV="0">
-            <a:off x="4391025" y="1123950"/>
-            <a:ext cx="3409950" cy="3905250"/>
+            <a:off x="4391025" y="2283862"/>
+            <a:ext cx="3409950" cy="1662824"/>
           </a:xfrm>
           <a:custGeom>
             <a:pathLst>
@@ -22001,7 +22001,7 @@
         </p:nvSpPr>
         <p:spPr>
           <a:xfrm rot="0" flipH="0" flipV="0">
-            <a:off x="4562475" y="1276350"/>
+            <a:off x="4562475" y="2436262"/>
             <a:ext cx="361950" cy="361950"/>
           </a:xfrm>
           <a:prstGeom prst="roundRect">
@@ -22041,7 +22041,7 @@
         </p:blipFill>
         <p:spPr>
           <a:xfrm rot="0" flipH="0" flipV="0">
-            <a:off x="4657725" y="1371600"/>
+            <a:off x="4657725" y="2531512"/>
             <a:ext cx="180975" cy="180975"/>
           </a:xfrm>
           <a:prstGeom prst="rect">
@@ -22058,7 +22058,7 @@
         </p:nvSpPr>
         <p:spPr>
           <a:xfrm rot="0" flipH="0" flipV="0">
-            <a:off x="5019675" y="1285875"/>
+            <a:off x="5019675" y="2445787"/>
             <a:ext cx="1076325" cy="209550"/>
           </a:xfrm>
           <a:prstGeom prst="rect"/>
@@ -22103,7 +22103,7 @@
         </p:nvSpPr>
         <p:spPr>
           <a:xfrm rot="0" flipH="0" flipV="0">
-            <a:off x="5019675" y="1495425"/>
+            <a:off x="5019675" y="2655337"/>
             <a:ext cx="1076325" cy="142875"/>
           </a:xfrm>
           <a:prstGeom prst="rect"/>
@@ -22138,7 +22138,7 @@
         </p:nvSpPr>
         <p:spPr>
           <a:xfrm rot="0" flipH="0" flipV="0">
-            <a:off x="4562475" y="1733550"/>
+            <a:off x="4562475" y="2893462"/>
             <a:ext cx="3067050" cy="514350"/>
           </a:xfrm>
           <a:prstGeom prst="rect"/>
@@ -22185,7 +22185,7 @@
         </p:nvSpPr>
         <p:spPr>
           <a:xfrm rot="0" flipH="0" flipV="0">
-            <a:off x="4562475" y="4695825"/>
+            <a:off x="4562475" y="3623812"/>
             <a:ext cx="3067050" cy="142875"/>
           </a:xfrm>
           <a:prstGeom prst="rect"/>
@@ -22220,8 +22220,8 @@
         </p:nvSpPr>
         <p:spPr>
           <a:xfrm rot="0" flipH="0" flipV="0">
-            <a:off x="7972425" y="1123950"/>
-            <a:ext cx="3419475" cy="3905250"/>
+            <a:off x="7972425" y="2283862"/>
+            <a:ext cx="3419475" cy="1662824"/>
           </a:xfrm>
           <a:prstGeom prst="roundRect">
             <a:avLst>
@@ -22246,8 +22246,8 @@
         </p:nvSpPr>
         <p:spPr>
           <a:xfrm rot="0" flipH="0" flipV="0">
-            <a:off x="7972425" y="1123950"/>
-            <a:ext cx="3419475" cy="3905250"/>
+            <a:off x="7972425" y="2283862"/>
+            <a:ext cx="3419475" cy="1662824"/>
           </a:xfrm>
           <a:custGeom>
             <a:pathLst>
@@ -22303,7 +22303,7 @@
         </p:nvSpPr>
         <p:spPr>
           <a:xfrm rot="0" flipH="0" flipV="0">
-            <a:off x="8143875" y="1276350"/>
+            <a:off x="8143875" y="2436262"/>
             <a:ext cx="361950" cy="361950"/>
           </a:xfrm>
           <a:prstGeom prst="roundRect">
@@ -22343,7 +22343,7 @@
         </p:blipFill>
         <p:spPr>
           <a:xfrm rot="0" flipH="0" flipV="0">
-            <a:off x="8239125" y="1371600"/>
+            <a:off x="8239125" y="2531512"/>
             <a:ext cx="180975" cy="180975"/>
           </a:xfrm>
           <a:prstGeom prst="rect">
@@ -22360,7 +22360,7 @@
         </p:nvSpPr>
         <p:spPr>
           <a:xfrm rot="0" flipH="0" flipV="0">
-            <a:off x="8601075" y="1285875"/>
+            <a:off x="8601075" y="2445787"/>
             <a:ext cx="733425" cy="209550"/>
           </a:xfrm>
           <a:prstGeom prst="rect"/>
@@ -22395,7 +22395,7 @@
         </p:nvSpPr>
         <p:spPr>
           <a:xfrm rot="0" flipH="0" flipV="0">
-            <a:off x="8601075" y="1495425"/>
+            <a:off x="8601075" y="2655337"/>
             <a:ext cx="733425" cy="142875"/>
           </a:xfrm>
           <a:prstGeom prst="rect"/>
@@ -22430,7 +22430,7 @@
         </p:nvSpPr>
         <p:spPr>
           <a:xfrm rot="0" flipH="0" flipV="0">
-            <a:off x="8143875" y="1733550"/>
+            <a:off x="8143875" y="2893462"/>
             <a:ext cx="3076575" cy="514350"/>
           </a:xfrm>
           <a:prstGeom prst="rect"/>
@@ -22527,7 +22527,7 @@
         </p:nvSpPr>
         <p:spPr>
           <a:xfrm rot="0" flipH="0" flipV="0">
-            <a:off x="8143875" y="4695825"/>
+            <a:off x="8143875" y="3623812"/>
             <a:ext cx="3076575" cy="142875"/>
           </a:xfrm>
           <a:prstGeom prst="rect"/>
@@ -22562,7 +22562,7 @@
         </p:nvSpPr>
         <p:spPr>
           <a:xfrm rot="0" flipH="0" flipV="0">
-            <a:off x="800100" y="5143500"/>
+            <a:off x="800100" y="4060987"/>
             <a:ext cx="5467350" cy="819150"/>
           </a:xfrm>
           <a:prstGeom prst="roundRect">
@@ -22593,7 +22593,7 @@
         </p:nvSpPr>
         <p:spPr>
           <a:xfrm rot="0" flipH="0" flipV="0">
-            <a:off x="990600" y="5267325"/>
+            <a:off x="990600" y="4184812"/>
             <a:ext cx="5086350" cy="571500"/>
           </a:xfrm>
           <a:prstGeom prst="rect"/>
@@ -22720,7 +22720,7 @@
         </p:nvSpPr>
         <p:spPr>
           <a:xfrm rot="0" flipH="0" flipV="0">
-            <a:off x="6419850" y="5143500"/>
+            <a:off x="6419850" y="4060987"/>
             <a:ext cx="5010150" cy="819150"/>
           </a:xfrm>
           <a:custGeom>
@@ -22760,7 +22760,7 @@
         </p:nvSpPr>
         <p:spPr>
           <a:xfrm rot="0" flipH="0" flipV="0">
-            <a:off x="6591300" y="5286375"/>
+            <a:off x="6591300" y="4203862"/>
             <a:ext cx="4800600" cy="533400"/>
           </a:xfrm>
           <a:prstGeom prst="rect"/>
@@ -24488,8 +24488,8 @@
         </p:nvSpPr>
         <p:spPr>
           <a:xfrm rot="0" flipH="0" flipV="0">
-            <a:off x="800100" y="3181350"/>
-            <a:ext cx="5219700" cy="2762250"/>
+            <a:off x="800100" y="3860813"/>
+            <a:ext cx="5219700" cy="1480724"/>
           </a:xfrm>
           <a:prstGeom prst="roundRect">
             <a:avLst>
@@ -24519,7 +24519,7 @@
         </p:nvSpPr>
         <p:spPr>
           <a:xfrm rot="0" flipH="0" flipV="0">
-            <a:off x="1009650" y="3333750"/>
+            <a:off x="1009650" y="4013213"/>
             <a:ext cx="4800600" cy="190500"/>
           </a:xfrm>
           <a:prstGeom prst="rect"/>
@@ -24564,7 +24564,7 @@
         </p:nvSpPr>
         <p:spPr>
           <a:xfrm rot="0" flipH="0" flipV="0">
-            <a:off x="1009650" y="3600450"/>
+            <a:off x="1009650" y="4279913"/>
             <a:ext cx="4800600" cy="561975"/>
           </a:xfrm>
           <a:prstGeom prst="rect"/>
@@ -24701,8 +24701,8 @@
         </p:nvSpPr>
         <p:spPr>
           <a:xfrm rot="0" flipH="0" flipV="0">
-            <a:off x="6172200" y="3181350"/>
-            <a:ext cx="5219700" cy="2762250"/>
+            <a:off x="6172200" y="3860813"/>
+            <a:ext cx="5219700" cy="1480724"/>
           </a:xfrm>
           <a:prstGeom prst="roundRect">
             <a:avLst>
@@ -24727,7 +24727,7 @@
         </p:nvSpPr>
         <p:spPr>
           <a:xfrm rot="0" flipH="0" flipV="0">
-            <a:off x="6381750" y="3333750"/>
+            <a:off x="6381750" y="4013213"/>
             <a:ext cx="4800600" cy="190500"/>
           </a:xfrm>
           <a:prstGeom prst="rect"/>
@@ -24772,7 +24772,7 @@
         </p:nvSpPr>
         <p:spPr>
           <a:xfrm rot="0" flipH="0" flipV="0">
-            <a:off x="6381750" y="3609975"/>
+            <a:off x="6381750" y="4289438"/>
             <a:ext cx="85725" cy="152400"/>
           </a:xfrm>
           <a:prstGeom prst="rect"/>
@@ -24817,7 +24817,7 @@
         </p:nvSpPr>
         <p:spPr>
           <a:xfrm rot="0" flipH="0" flipV="0">
-            <a:off x="6543675" y="3600450"/>
+            <a:off x="6543675" y="4279913"/>
             <a:ext cx="2447925" cy="238125"/>
           </a:xfrm>
           <a:prstGeom prst="rect"/>
@@ -24854,7 +24854,7 @@
         </p:nvSpPr>
         <p:spPr>
           <a:xfrm rot="0" flipH="0" flipV="0">
-            <a:off x="6381750" y="3895725"/>
+            <a:off x="6381750" y="4575188"/>
             <a:ext cx="114300" cy="152400"/>
           </a:xfrm>
           <a:prstGeom prst="rect"/>
@@ -24899,7 +24899,7 @@
         </p:nvSpPr>
         <p:spPr>
           <a:xfrm rot="0" flipH="0" flipV="0">
-            <a:off x="6572250" y="3886200"/>
+            <a:off x="6572250" y="4565663"/>
             <a:ext cx="1866900" cy="238125"/>
           </a:xfrm>
           <a:prstGeom prst="rect"/>
@@ -24960,7 +24960,7 @@
         </p:nvSpPr>
         <p:spPr>
           <a:xfrm rot="0" flipH="0" flipV="0">
-            <a:off x="6381750" y="4181475"/>
+            <a:off x="6381750" y="4860938"/>
             <a:ext cx="114300" cy="152400"/>
           </a:xfrm>
           <a:prstGeom prst="rect"/>
@@ -25005,7 +25005,7 @@
         </p:nvSpPr>
         <p:spPr>
           <a:xfrm rot="0" flipH="0" flipV="0">
-            <a:off x="6572250" y="4171950"/>
+            <a:off x="6572250" y="4851413"/>
             <a:ext cx="2057400" cy="238125"/>
           </a:xfrm>
           <a:prstGeom prst="rect"/>
@@ -25042,7 +25042,7 @@
         </p:nvSpPr>
         <p:spPr>
           <a:xfrm rot="0" flipH="0" flipV="0">
-            <a:off x="800100" y="1143000"/>
+            <a:off x="800100" y="1822463"/>
             <a:ext cx="2028825" cy="1866900"/>
           </a:xfrm>
           <a:prstGeom prst="roundRect">
@@ -25068,7 +25068,7 @@
         </p:nvSpPr>
         <p:spPr>
           <a:xfrm rot="0" flipH="0" flipV="0">
-            <a:off x="800100" y="1143000"/>
+            <a:off x="800100" y="1822463"/>
             <a:ext cx="2028825" cy="1866900"/>
           </a:xfrm>
           <a:custGeom>
@@ -25125,7 +25125,7 @@
         </p:nvSpPr>
         <p:spPr>
           <a:xfrm rot="0" flipH="0" flipV="0">
-            <a:off x="914400" y="1276350"/>
+            <a:off x="914400" y="1955813"/>
             <a:ext cx="323850" cy="323850"/>
           </a:xfrm>
           <a:prstGeom prst="roundRect">
@@ -25151,7 +25151,7 @@
         </p:nvSpPr>
         <p:spPr>
           <a:xfrm rot="0" flipH="0" flipV="0">
-            <a:off x="1028700" y="1343025"/>
+            <a:off x="1028700" y="2022488"/>
             <a:ext cx="104775" cy="190500"/>
           </a:xfrm>
           <a:prstGeom prst="rect"/>
@@ -25186,7 +25186,7 @@
         </p:nvSpPr>
         <p:spPr>
           <a:xfrm rot="0" flipH="0" flipV="0">
-            <a:off x="2171700" y="1343025"/>
+            <a:off x="2171700" y="2022488"/>
             <a:ext cx="542925" cy="200025"/>
           </a:xfrm>
           <a:prstGeom prst="roundRect">
@@ -25212,7 +25212,7 @@
         </p:nvSpPr>
         <p:spPr>
           <a:xfrm rot="0" flipH="0" flipV="0">
-            <a:off x="2257425" y="1371600"/>
+            <a:off x="2257425" y="2051063"/>
             <a:ext cx="371475" cy="142875"/>
           </a:xfrm>
           <a:prstGeom prst="rect"/>
@@ -25261,7 +25261,7 @@
         </p:blipFill>
         <p:spPr>
           <a:xfrm rot="0" flipH="0" flipV="0">
-            <a:off x="914400" y="2152650"/>
+            <a:off x="914400" y="2832113"/>
             <a:ext cx="228600" cy="228600"/>
           </a:xfrm>
           <a:prstGeom prst="rect">
@@ -25278,7 +25278,7 @@
         </p:nvSpPr>
         <p:spPr>
           <a:xfrm rot="0" flipH="0" flipV="0">
-            <a:off x="914400" y="2438400"/>
+            <a:off x="914400" y="3117863"/>
             <a:ext cx="1800225" cy="200025"/>
           </a:xfrm>
           <a:prstGeom prst="rect"/>
@@ -25323,7 +25323,7 @@
         </p:nvSpPr>
         <p:spPr>
           <a:xfrm rot="0" flipH="0" flipV="0">
-            <a:off x="914400" y="2667000"/>
+            <a:off x="914400" y="3346463"/>
             <a:ext cx="1800225" cy="209550"/>
           </a:xfrm>
           <a:prstGeom prst="rect"/>
@@ -25398,7 +25398,7 @@
         </p:nvSpPr>
         <p:spPr>
           <a:xfrm rot="0" flipH="0" flipV="0">
-            <a:off x="2943225" y="1143000"/>
+            <a:off x="2943225" y="1822463"/>
             <a:ext cx="2028825" cy="1866900"/>
           </a:xfrm>
           <a:prstGeom prst="roundRect">
@@ -25424,7 +25424,7 @@
         </p:nvSpPr>
         <p:spPr>
           <a:xfrm rot="0" flipH="0" flipV="0">
-            <a:off x="2943225" y="1143000"/>
+            <a:off x="2943225" y="1822463"/>
             <a:ext cx="2028825" cy="1866900"/>
           </a:xfrm>
           <a:custGeom>
@@ -25481,7 +25481,7 @@
         </p:nvSpPr>
         <p:spPr>
           <a:xfrm rot="0" flipH="0" flipV="0">
-            <a:off x="3057525" y="1276350"/>
+            <a:off x="3057525" y="1955813"/>
             <a:ext cx="323850" cy="323850"/>
           </a:xfrm>
           <a:prstGeom prst="roundRect">
@@ -25507,7 +25507,7 @@
         </p:nvSpPr>
         <p:spPr>
           <a:xfrm rot="0" flipH="0" flipV="0">
-            <a:off x="3162300" y="1343025"/>
+            <a:off x="3162300" y="2022488"/>
             <a:ext cx="114300" cy="190500"/>
           </a:xfrm>
           <a:prstGeom prst="rect"/>
@@ -25542,7 +25542,7 @@
         </p:nvSpPr>
         <p:spPr>
           <a:xfrm rot="0" flipH="0" flipV="0">
-            <a:off x="4295775" y="1343025"/>
+            <a:off x="4295775" y="2022488"/>
             <a:ext cx="561975" cy="200025"/>
           </a:xfrm>
           <a:prstGeom prst="roundRect">
@@ -25568,7 +25568,7 @@
         </p:nvSpPr>
         <p:spPr>
           <a:xfrm rot="0" flipH="0" flipV="0">
-            <a:off x="4381500" y="1371600"/>
+            <a:off x="4381500" y="2051063"/>
             <a:ext cx="390525" cy="142875"/>
           </a:xfrm>
           <a:prstGeom prst="rect"/>
@@ -25617,7 +25617,7 @@
         </p:blipFill>
         <p:spPr>
           <a:xfrm rot="0" flipH="0" flipV="0">
-            <a:off x="3057525" y="2152650"/>
+            <a:off x="3057525" y="2832113"/>
             <a:ext cx="228600" cy="228600"/>
           </a:xfrm>
           <a:prstGeom prst="rect">
@@ -25634,7 +25634,7 @@
         </p:nvSpPr>
         <p:spPr>
           <a:xfrm rot="0" flipH="0" flipV="0">
-            <a:off x="3057525" y="2438400"/>
+            <a:off x="3057525" y="3117863"/>
             <a:ext cx="1800225" cy="200025"/>
           </a:xfrm>
           <a:prstGeom prst="rect"/>
@@ -25679,7 +25679,7 @@
         </p:nvSpPr>
         <p:spPr>
           <a:xfrm rot="0" flipH="0" flipV="0">
-            <a:off x="3057525" y="2667000"/>
+            <a:off x="3057525" y="3346463"/>
             <a:ext cx="1800225" cy="209550"/>
           </a:xfrm>
           <a:prstGeom prst="rect"/>
@@ -25754,7 +25754,7 @@
         </p:nvSpPr>
         <p:spPr>
           <a:xfrm rot="0" flipH="0" flipV="0">
-            <a:off x="5086350" y="1143000"/>
+            <a:off x="5086350" y="1822463"/>
             <a:ext cx="2019300" cy="1866900"/>
           </a:xfrm>
           <a:prstGeom prst="roundRect">
@@ -25780,7 +25780,7 @@
         </p:nvSpPr>
         <p:spPr>
           <a:xfrm rot="0" flipH="0" flipV="0">
-            <a:off x="5086350" y="1143000"/>
+            <a:off x="5086350" y="1822463"/>
             <a:ext cx="2019300" cy="1866900"/>
           </a:xfrm>
           <a:custGeom>
@@ -25837,7 +25837,7 @@
         </p:nvSpPr>
         <p:spPr>
           <a:xfrm rot="0" flipH="0" flipV="0">
-            <a:off x="5200650" y="1276350"/>
+            <a:off x="5200650" y="1955813"/>
             <a:ext cx="323850" cy="323850"/>
           </a:xfrm>
           <a:prstGeom prst="roundRect">
@@ -25863,7 +25863,7 @@
         </p:nvSpPr>
         <p:spPr>
           <a:xfrm rot="0" flipH="0" flipV="0">
-            <a:off x="5305425" y="1343025"/>
+            <a:off x="5305425" y="2022488"/>
             <a:ext cx="114300" cy="190500"/>
           </a:xfrm>
           <a:prstGeom prst="rect"/>
@@ -25898,7 +25898,7 @@
         </p:nvSpPr>
         <p:spPr>
           <a:xfrm rot="0" flipH="0" flipV="0">
-            <a:off x="6429375" y="1343025"/>
+            <a:off x="6429375" y="2022488"/>
             <a:ext cx="561975" cy="200025"/>
           </a:xfrm>
           <a:prstGeom prst="roundRect">
@@ -25924,7 +25924,7 @@
         </p:nvSpPr>
         <p:spPr>
           <a:xfrm rot="0" flipH="0" flipV="0">
-            <a:off x="6515100" y="1371600"/>
+            <a:off x="6515100" y="2051063"/>
             <a:ext cx="390525" cy="142875"/>
           </a:xfrm>
           <a:prstGeom prst="rect"/>
@@ -25973,7 +25973,7 @@
         </p:blipFill>
         <p:spPr>
           <a:xfrm rot="0" flipH="0" flipV="0">
-            <a:off x="5200650" y="2152650"/>
+            <a:off x="5200650" y="2832113"/>
             <a:ext cx="228600" cy="228600"/>
           </a:xfrm>
           <a:prstGeom prst="rect">
@@ -25990,7 +25990,7 @@
         </p:nvSpPr>
         <p:spPr>
           <a:xfrm rot="0" flipH="0" flipV="0">
-            <a:off x="5200650" y="2438400"/>
+            <a:off x="5200650" y="3117863"/>
             <a:ext cx="1790700" cy="200025"/>
           </a:xfrm>
           <a:prstGeom prst="rect"/>
@@ -26025,7 +26025,7 @@
         </p:nvSpPr>
         <p:spPr>
           <a:xfrm rot="0" flipH="0" flipV="0">
-            <a:off x="5200650" y="2667000"/>
+            <a:off x="5200650" y="3346463"/>
             <a:ext cx="1790700" cy="209550"/>
           </a:xfrm>
           <a:prstGeom prst="rect"/>
@@ -26060,7 +26060,7 @@
         </p:nvSpPr>
         <p:spPr>
           <a:xfrm rot="0" flipH="0" flipV="0">
-            <a:off x="7219950" y="1143000"/>
+            <a:off x="7219950" y="1822463"/>
             <a:ext cx="2028825" cy="1866900"/>
           </a:xfrm>
           <a:prstGeom prst="roundRect">
@@ -26086,7 +26086,7 @@
         </p:nvSpPr>
         <p:spPr>
           <a:xfrm rot="0" flipH="0" flipV="0">
-            <a:off x="7219950" y="1143000"/>
+            <a:off x="7219950" y="1822463"/>
             <a:ext cx="2028825" cy="1866900"/>
           </a:xfrm>
           <a:custGeom>
@@ -26143,7 +26143,7 @@
         </p:nvSpPr>
         <p:spPr>
           <a:xfrm rot="0" flipH="0" flipV="0">
-            <a:off x="7334250" y="1276350"/>
+            <a:off x="7334250" y="1955813"/>
             <a:ext cx="323850" cy="323850"/>
           </a:xfrm>
           <a:prstGeom prst="roundRect">
@@ -26169,7 +26169,7 @@
         </p:nvSpPr>
         <p:spPr>
           <a:xfrm rot="0" flipH="0" flipV="0">
-            <a:off x="7439025" y="1343025"/>
+            <a:off x="7439025" y="2022488"/>
             <a:ext cx="114300" cy="190500"/>
           </a:xfrm>
           <a:prstGeom prst="rect"/>
@@ -26204,7 +26204,7 @@
         </p:nvSpPr>
         <p:spPr>
           <a:xfrm rot="0" flipH="0" flipV="0">
-            <a:off x="8591550" y="1343025"/>
+            <a:off x="8591550" y="2022488"/>
             <a:ext cx="542925" cy="200025"/>
           </a:xfrm>
           <a:prstGeom prst="roundRect">
@@ -26230,7 +26230,7 @@
         </p:nvSpPr>
         <p:spPr>
           <a:xfrm rot="0" flipH="0" flipV="0">
-            <a:off x="8677275" y="1371600"/>
+            <a:off x="8677275" y="2051063"/>
             <a:ext cx="371475" cy="142875"/>
           </a:xfrm>
           <a:prstGeom prst="rect"/>
@@ -26279,7 +26279,7 @@
         </p:blipFill>
         <p:spPr>
           <a:xfrm rot="0" flipH="0" flipV="0">
-            <a:off x="7334250" y="2152650"/>
+            <a:off x="7334250" y="2832113"/>
             <a:ext cx="228600" cy="228600"/>
           </a:xfrm>
           <a:prstGeom prst="rect">
@@ -26296,7 +26296,7 @@
         </p:nvSpPr>
         <p:spPr>
           <a:xfrm rot="0" flipH="0" flipV="0">
-            <a:off x="7334250" y="2438400"/>
+            <a:off x="7334250" y="3117863"/>
             <a:ext cx="1800225" cy="200025"/>
           </a:xfrm>
           <a:prstGeom prst="rect"/>
@@ -26331,7 +26331,7 @@
         </p:nvSpPr>
         <p:spPr>
           <a:xfrm rot="0" flipH="0" flipV="0">
-            <a:off x="7334250" y="2667000"/>
+            <a:off x="7334250" y="3346463"/>
             <a:ext cx="1800225" cy="209550"/>
           </a:xfrm>
           <a:prstGeom prst="rect"/>
@@ -26406,7 +26406,7 @@
         </p:nvSpPr>
         <p:spPr>
           <a:xfrm rot="0" flipH="0" flipV="0">
-            <a:off x="9363075" y="1143000"/>
+            <a:off x="9363075" y="1822463"/>
             <a:ext cx="2028825" cy="1866900"/>
           </a:xfrm>
           <a:prstGeom prst="roundRect">
@@ -26432,7 +26432,7 @@
         </p:nvSpPr>
         <p:spPr>
           <a:xfrm rot="0" flipH="0" flipV="0">
-            <a:off x="9363075" y="1143000"/>
+            <a:off x="9363075" y="1822463"/>
             <a:ext cx="2028825" cy="1866900"/>
           </a:xfrm>
           <a:custGeom>
@@ -26489,7 +26489,7 @@
         </p:nvSpPr>
         <p:spPr>
           <a:xfrm rot="0" flipH="0" flipV="0">
-            <a:off x="9477375" y="1276350"/>
+            <a:off x="9477375" y="1955813"/>
             <a:ext cx="323850" cy="323850"/>
           </a:xfrm>
           <a:prstGeom prst="roundRect">
@@ -26515,7 +26515,7 @@
         </p:nvSpPr>
         <p:spPr>
           <a:xfrm rot="0" flipH="0" flipV="0">
-            <a:off x="9591675" y="1343025"/>
+            <a:off x="9591675" y="2022488"/>
             <a:ext cx="104775" cy="190500"/>
           </a:xfrm>
           <a:prstGeom prst="rect"/>
@@ -26550,7 +26550,7 @@
         </p:nvSpPr>
         <p:spPr>
           <a:xfrm rot="0" flipH="0" flipV="0">
-            <a:off x="10782300" y="1343025"/>
+            <a:off x="10782300" y="2022488"/>
             <a:ext cx="495300" cy="200025"/>
           </a:xfrm>
           <a:prstGeom prst="roundRect">
@@ -26576,7 +26576,7 @@
         </p:nvSpPr>
         <p:spPr>
           <a:xfrm rot="0" flipH="0" flipV="0">
-            <a:off x="10868025" y="1371600"/>
+            <a:off x="10868025" y="2051063"/>
             <a:ext cx="323850" cy="142875"/>
           </a:xfrm>
           <a:prstGeom prst="rect"/>
@@ -26625,7 +26625,7 @@
         </p:blipFill>
         <p:spPr>
           <a:xfrm rot="0" flipH="0" flipV="0">
-            <a:off x="9477375" y="2152650"/>
+            <a:off x="9477375" y="2832113"/>
             <a:ext cx="228600" cy="228600"/>
           </a:xfrm>
           <a:prstGeom prst="rect">
@@ -26642,7 +26642,7 @@
         </p:nvSpPr>
         <p:spPr>
           <a:xfrm rot="0" flipH="0" flipV="0">
-            <a:off x="9477375" y="2438400"/>
+            <a:off x="9477375" y="3117863"/>
             <a:ext cx="1800225" cy="200025"/>
           </a:xfrm>
           <a:prstGeom prst="rect"/>
@@ -26677,7 +26677,7 @@
         </p:nvSpPr>
         <p:spPr>
           <a:xfrm rot="0" flipH="0" flipV="0">
-            <a:off x="9477375" y="2667000"/>
+            <a:off x="9477375" y="3346463"/>
             <a:ext cx="1800225" cy="209550"/>
           </a:xfrm>
           <a:prstGeom prst="rect"/>
@@ -26816,7 +26816,7 @@
         </p:blipFill>
         <p:spPr>
           <a:xfrm rot="0" flipH="0" flipV="0">
-            <a:off x="2781300" y="1943100"/>
+            <a:off x="2781300" y="2622563"/>
             <a:ext cx="161925" cy="161925"/>
           </a:xfrm>
           <a:prstGeom prst="rect">
@@ -26847,7 +26847,7 @@
         </p:blipFill>
         <p:spPr>
           <a:xfrm rot="0" flipH="0" flipV="0">
-            <a:off x="4924425" y="1943100"/>
+            <a:off x="4924425" y="2622563"/>
             <a:ext cx="161925" cy="161925"/>
           </a:xfrm>
           <a:prstGeom prst="rect">
@@ -26878,7 +26878,7 @@
         </p:blipFill>
         <p:spPr>
           <a:xfrm rot="0" flipH="0" flipV="0">
-            <a:off x="7058025" y="1943100"/>
+            <a:off x="7058025" y="2622563"/>
             <a:ext cx="161925" cy="161925"/>
           </a:xfrm>
           <a:prstGeom prst="rect">
@@ -26909,7 +26909,7 @@
         </p:blipFill>
         <p:spPr>
           <a:xfrm rot="0" flipH="0" flipV="0">
-            <a:off x="9201150" y="1943100"/>
+            <a:off x="9201150" y="2622563"/>
             <a:ext cx="161925" cy="161925"/>
           </a:xfrm>
           <a:prstGeom prst="rect">
@@ -27098,7 +27098,7 @@
         </p:nvSpPr>
         <p:spPr>
           <a:xfrm rot="0" flipH="0" flipV="0">
-            <a:off x="838200" y="1085850"/>
+            <a:off x="838200" y="1486500"/>
             <a:ext cx="5867400" cy="714375"/>
           </a:xfrm>
           <a:prstGeom prst="roundRect">
@@ -27124,7 +27124,7 @@
         </p:nvSpPr>
         <p:spPr>
           <a:xfrm rot="0" flipH="0" flipV="0">
-            <a:off x="838200" y="1085850"/>
+            <a:off x="838200" y="1486500"/>
             <a:ext cx="5867400" cy="714375"/>
           </a:xfrm>
           <a:custGeom>
@@ -27181,7 +27181,7 @@
         </p:nvSpPr>
         <p:spPr>
           <a:xfrm rot="0" flipH="0" flipV="0">
-            <a:off x="1000125" y="1209675"/>
+            <a:off x="1000125" y="1610325"/>
             <a:ext cx="342900" cy="200025"/>
           </a:xfrm>
           <a:prstGeom prst="rect"/>
@@ -27226,7 +27226,7 @@
         </p:nvSpPr>
         <p:spPr>
           <a:xfrm rot="0" flipH="0" flipV="0">
-            <a:off x="1438275" y="1209675"/>
+            <a:off x="1438275" y="1610325"/>
             <a:ext cx="809625" cy="200025"/>
           </a:xfrm>
           <a:prstGeom prst="rect"/>
@@ -27261,7 +27261,7 @@
         </p:nvSpPr>
         <p:spPr>
           <a:xfrm rot="0" flipH="0" flipV="0">
-            <a:off x="1000125" y="1438275"/>
+            <a:off x="1000125" y="1838925"/>
             <a:ext cx="5505450" cy="238125"/>
           </a:xfrm>
           <a:prstGeom prst="rect"/>
@@ -27376,7 +27376,7 @@
         </p:nvSpPr>
         <p:spPr>
           <a:xfrm rot="0" flipH="0" flipV="0">
-            <a:off x="838200" y="1914525"/>
+            <a:off x="838200" y="2315175"/>
             <a:ext cx="5867400" cy="714375"/>
           </a:xfrm>
           <a:prstGeom prst="roundRect">
@@ -27402,7 +27402,7 @@
         </p:nvSpPr>
         <p:spPr>
           <a:xfrm rot="0" flipH="0" flipV="0">
-            <a:off x="838200" y="1914525"/>
+            <a:off x="838200" y="2315175"/>
             <a:ext cx="5867400" cy="714375"/>
           </a:xfrm>
           <a:custGeom>
@@ -27459,7 +27459,7 @@
         </p:nvSpPr>
         <p:spPr>
           <a:xfrm rot="0" flipH="0" flipV="0">
-            <a:off x="1000125" y="2038350"/>
+            <a:off x="1000125" y="2439000"/>
             <a:ext cx="371475" cy="200025"/>
           </a:xfrm>
           <a:prstGeom prst="rect"/>
@@ -27504,7 +27504,7 @@
         </p:nvSpPr>
         <p:spPr>
           <a:xfrm rot="0" flipH="0" flipV="0">
-            <a:off x="1466850" y="2038350"/>
+            <a:off x="1466850" y="2439000"/>
             <a:ext cx="647700" cy="200025"/>
           </a:xfrm>
           <a:prstGeom prst="rect"/>
@@ -27539,7 +27539,7 @@
         </p:nvSpPr>
         <p:spPr>
           <a:xfrm rot="0" flipH="0" flipV="0">
-            <a:off x="1000125" y="2266950"/>
+            <a:off x="1000125" y="2667600"/>
             <a:ext cx="5505450" cy="238125"/>
           </a:xfrm>
           <a:prstGeom prst="rect"/>
@@ -27634,7 +27634,7 @@
         </p:nvSpPr>
         <p:spPr>
           <a:xfrm rot="0" flipH="0" flipV="0">
-            <a:off x="838200" y="2743200"/>
+            <a:off x="838200" y="3143850"/>
             <a:ext cx="5867400" cy="714375"/>
           </a:xfrm>
           <a:prstGeom prst="roundRect">
@@ -27660,7 +27660,7 @@
         </p:nvSpPr>
         <p:spPr>
           <a:xfrm rot="0" flipH="0" flipV="0">
-            <a:off x="838200" y="2743200"/>
+            <a:off x="838200" y="3143850"/>
             <a:ext cx="5867400" cy="714375"/>
           </a:xfrm>
           <a:custGeom>
@@ -27717,7 +27717,7 @@
         </p:nvSpPr>
         <p:spPr>
           <a:xfrm rot="0" flipH="0" flipV="0">
-            <a:off x="1000125" y="2867025"/>
+            <a:off x="1000125" y="3267675"/>
             <a:ext cx="371475" cy="200025"/>
           </a:xfrm>
           <a:prstGeom prst="rect"/>
@@ -27762,7 +27762,7 @@
         </p:nvSpPr>
         <p:spPr>
           <a:xfrm rot="0" flipH="0" flipV="0">
-            <a:off x="1466850" y="2867025"/>
+            <a:off x="1466850" y="3267675"/>
             <a:ext cx="647700" cy="200025"/>
           </a:xfrm>
           <a:prstGeom prst="rect"/>
@@ -27797,7 +27797,7 @@
         </p:nvSpPr>
         <p:spPr>
           <a:xfrm rot="0" flipH="0" flipV="0">
-            <a:off x="1000125" y="3095625"/>
+            <a:off x="1000125" y="3496275"/>
             <a:ext cx="5505450" cy="238125"/>
           </a:xfrm>
           <a:prstGeom prst="rect"/>
@@ -27852,7 +27852,7 @@
         </p:nvSpPr>
         <p:spPr>
           <a:xfrm rot="0" flipH="0" flipV="0">
-            <a:off x="800100" y="3571875"/>
+            <a:off x="800100" y="3972525"/>
             <a:ext cx="5905500" cy="257175"/>
           </a:xfrm>
           <a:custGeom>
@@ -27892,7 +27892,7 @@
         </p:nvSpPr>
         <p:spPr>
           <a:xfrm rot="0" flipH="0" flipV="0">
-            <a:off x="971550" y="3571875"/>
+            <a:off x="971550" y="3972525"/>
             <a:ext cx="5695950" cy="257175"/>
           </a:xfrm>
           <a:prstGeom prst="rect"/>
@@ -27977,7 +27977,7 @@
         </p:nvSpPr>
         <p:spPr>
           <a:xfrm rot="0" flipH="0" flipV="0">
-            <a:off x="6915150" y="1085850"/>
+            <a:off x="6915150" y="1486500"/>
             <a:ext cx="4476750" cy="4191000"/>
           </a:xfrm>
           <a:prstGeom prst="roundRect">
@@ -28003,7 +28003,7 @@
         </p:nvSpPr>
         <p:spPr>
           <a:xfrm rot="0" flipH="0" flipV="0">
-            <a:off x="7124700" y="1257300"/>
+            <a:off x="7124700" y="1657950"/>
             <a:ext cx="4057650" cy="161925"/>
           </a:xfrm>
           <a:prstGeom prst="rect"/>
@@ -28068,7 +28068,7 @@
         </p:nvSpPr>
         <p:spPr>
           <a:xfrm rot="0" flipH="0" flipV="0">
-            <a:off x="7124700" y="1495425"/>
+            <a:off x="7124700" y="1896075"/>
             <a:ext cx="4057650" cy="3781425"/>
           </a:xfrm>
           <a:prstGeom prst="rect"/>
@@ -28648,7 +28648,7 @@
         </p:nvSpPr>
         <p:spPr>
           <a:xfrm rot="0" flipH="0" flipV="0">
-            <a:off x="800100" y="1085850"/>
+            <a:off x="800100" y="1515075"/>
             <a:ext cx="4476750" cy="2733675"/>
           </a:xfrm>
           <a:prstGeom prst="roundRect">
@@ -28674,7 +28674,7 @@
         </p:nvSpPr>
         <p:spPr>
           <a:xfrm rot="0" flipH="0" flipV="0">
-            <a:off x="1009650" y="1238250"/>
+            <a:off x="1009650" y="1667475"/>
             <a:ext cx="4057650" cy="161925"/>
           </a:xfrm>
           <a:prstGeom prst="rect"/>
@@ -28729,7 +28729,7 @@
         </p:nvSpPr>
         <p:spPr>
           <a:xfrm rot="0" flipH="0" flipV="0">
-            <a:off x="1009650" y="1457325"/>
+            <a:off x="1009650" y="1886550"/>
             <a:ext cx="4057650" cy="2209800"/>
           </a:xfrm>
           <a:prstGeom prst="rect"/>
@@ -28927,7 +28927,7 @@
         </p:nvSpPr>
         <p:spPr>
           <a:xfrm rot="0" flipH="0" flipV="0">
-            <a:off x="800100" y="3933825"/>
+            <a:off x="800100" y="4363050"/>
             <a:ext cx="4476750" cy="762000"/>
           </a:xfrm>
           <a:prstGeom prst="roundRect">
@@ -28958,7 +28958,7 @@
         </p:nvSpPr>
         <p:spPr>
           <a:xfrm rot="0" flipH="0" flipV="0">
-            <a:off x="971550" y="4057650"/>
+            <a:off x="971550" y="4486875"/>
             <a:ext cx="4133850" cy="514350"/>
           </a:xfrm>
           <a:prstGeom prst="rect"/>
@@ -29075,7 +29075,7 @@
         </p:nvSpPr>
         <p:spPr>
           <a:xfrm rot="0" flipH="0" flipV="0">
-            <a:off x="5524500" y="1838325"/>
+            <a:off x="5524500" y="2267550"/>
             <a:ext cx="5867400" cy="200025"/>
           </a:xfrm>
           <a:prstGeom prst="rect"/>
@@ -29120,7 +29120,7 @@
         </p:nvSpPr>
         <p:spPr>
           <a:xfrm rot="0" flipH="0" flipV="0">
-            <a:off x="5562600" y="2143125"/>
+            <a:off x="5562600" y="2572350"/>
             <a:ext cx="5867400" cy="600075"/>
           </a:xfrm>
           <a:prstGeom prst="roundRect">
@@ -29146,7 +29146,7 @@
         </p:nvSpPr>
         <p:spPr>
           <a:xfrm rot="0" flipH="0" flipV="0">
-            <a:off x="5562600" y="2143125"/>
+            <a:off x="5562600" y="2572350"/>
             <a:ext cx="5867400" cy="600075"/>
           </a:xfrm>
           <a:custGeom>
@@ -29203,7 +29203,7 @@
         </p:nvSpPr>
         <p:spPr>
           <a:xfrm rot="0" flipH="0" flipV="0">
-            <a:off x="5715000" y="2257425"/>
+            <a:off x="5715000" y="2686650"/>
             <a:ext cx="5524500" cy="180975"/>
           </a:xfrm>
           <a:prstGeom prst="rect"/>
@@ -29248,7 +29248,7 @@
         </p:nvSpPr>
         <p:spPr>
           <a:xfrm rot="0" flipH="0" flipV="0">
-            <a:off x="5715000" y="2486025"/>
+            <a:off x="5715000" y="2915250"/>
             <a:ext cx="5524500" cy="142875"/>
           </a:xfrm>
           <a:prstGeom prst="rect"/>
@@ -29293,7 +29293,7 @@
         </p:nvSpPr>
         <p:spPr>
           <a:xfrm rot="0" flipH="0" flipV="0">
-            <a:off x="5562600" y="2847975"/>
+            <a:off x="5562600" y="3277200"/>
             <a:ext cx="5867400" cy="600075"/>
           </a:xfrm>
           <a:prstGeom prst="roundRect">
@@ -29319,7 +29319,7 @@
         </p:nvSpPr>
         <p:spPr>
           <a:xfrm rot="0" flipH="0" flipV="0">
-            <a:off x="5562600" y="2847975"/>
+            <a:off x="5562600" y="3277200"/>
             <a:ext cx="5867400" cy="600075"/>
           </a:xfrm>
           <a:custGeom>
@@ -29376,7 +29376,7 @@
         </p:nvSpPr>
         <p:spPr>
           <a:xfrm rot="0" flipH="0" flipV="0">
-            <a:off x="5715000" y="2962275"/>
+            <a:off x="5715000" y="3391500"/>
             <a:ext cx="5524500" cy="180975"/>
           </a:xfrm>
           <a:prstGeom prst="rect"/>
@@ -29421,7 +29421,7 @@
         </p:nvSpPr>
         <p:spPr>
           <a:xfrm rot="0" flipH="0" flipV="0">
-            <a:off x="5715000" y="3190875"/>
+            <a:off x="5715000" y="3620100"/>
             <a:ext cx="5524500" cy="142875"/>
           </a:xfrm>
           <a:prstGeom prst="rect"/>
@@ -29466,7 +29466,7 @@
         </p:nvSpPr>
         <p:spPr>
           <a:xfrm rot="0" flipH="0" flipV="0">
-            <a:off x="5562600" y="3552825"/>
+            <a:off x="5562600" y="3982050"/>
             <a:ext cx="5867400" cy="600075"/>
           </a:xfrm>
           <a:prstGeom prst="roundRect">
@@ -29492,7 +29492,7 @@
         </p:nvSpPr>
         <p:spPr>
           <a:xfrm rot="0" flipH="0" flipV="0">
-            <a:off x="5562600" y="3552825"/>
+            <a:off x="5562600" y="3982050"/>
             <a:ext cx="5867400" cy="600075"/>
           </a:xfrm>
           <a:custGeom>
@@ -29549,7 +29549,7 @@
         </p:nvSpPr>
         <p:spPr>
           <a:xfrm rot="0" flipH="0" flipV="0">
-            <a:off x="5715000" y="3667125"/>
+            <a:off x="5715000" y="4096350"/>
             <a:ext cx="5524500" cy="180975"/>
           </a:xfrm>
           <a:prstGeom prst="rect"/>
@@ -29594,7 +29594,7 @@
         </p:nvSpPr>
         <p:spPr>
           <a:xfrm rot="0" flipH="0" flipV="0">
-            <a:off x="5715000" y="3895725"/>
+            <a:off x="5715000" y="4324950"/>
             <a:ext cx="5524500" cy="142875"/>
           </a:xfrm>
           <a:prstGeom prst="rect"/>
@@ -29639,7 +29639,7 @@
         </p:nvSpPr>
         <p:spPr>
           <a:xfrm rot="0" flipH="0" flipV="0">
-            <a:off x="5562600" y="4257675"/>
+            <a:off x="5562600" y="4686900"/>
             <a:ext cx="5867400" cy="600075"/>
           </a:xfrm>
           <a:prstGeom prst="roundRect">
@@ -29665,7 +29665,7 @@
         </p:nvSpPr>
         <p:spPr>
           <a:xfrm rot="0" flipH="0" flipV="0">
-            <a:off x="5562600" y="4257675"/>
+            <a:off x="5562600" y="4686900"/>
             <a:ext cx="5867400" cy="600075"/>
           </a:xfrm>
           <a:custGeom>
@@ -29722,7 +29722,7 @@
         </p:nvSpPr>
         <p:spPr>
           <a:xfrm rot="0" flipH="0" flipV="0">
-            <a:off x="5715000" y="4371975"/>
+            <a:off x="5715000" y="4801200"/>
             <a:ext cx="5524500" cy="180975"/>
           </a:xfrm>
           <a:prstGeom prst="rect"/>
@@ -29767,7 +29767,7 @@
         </p:nvSpPr>
         <p:spPr>
           <a:xfrm rot="0" flipH="0" flipV="0">
-            <a:off x="5715000" y="4600575"/>
+            <a:off x="5715000" y="5029800"/>
             <a:ext cx="5524500" cy="142875"/>
           </a:xfrm>
           <a:prstGeom prst="rect"/>
@@ -29812,7 +29812,7 @@
         </p:nvSpPr>
         <p:spPr>
           <a:xfrm rot="0" flipH="0" flipV="0">
-            <a:off x="5524500" y="4962525"/>
+            <a:off x="5524500" y="5391750"/>
             <a:ext cx="5905500" cy="257175"/>
           </a:xfrm>
           <a:custGeom>
@@ -29852,7 +29852,7 @@
         </p:nvSpPr>
         <p:spPr>
           <a:xfrm rot="0" flipH="0" flipV="0">
-            <a:off x="5695950" y="4962525"/>
+            <a:off x="5695950" y="5391750"/>
             <a:ext cx="5695950" cy="257175"/>
           </a:xfrm>
           <a:prstGeom prst="rect"/>
@@ -30189,8 +30189,8 @@
         </p:nvSpPr>
         <p:spPr>
           <a:xfrm rot="0" flipH="0" flipV="0">
-            <a:off x="800100" y="1123950"/>
-            <a:ext cx="3419475" cy="4019550"/>
+            <a:off x="800100" y="1517100"/>
+            <a:ext cx="3419475" cy="3310649"/>
           </a:xfrm>
           <a:prstGeom prst="roundRect">
             <a:avLst>
@@ -30215,8 +30215,8 @@
         </p:nvSpPr>
         <p:spPr>
           <a:xfrm rot="0" flipH="0" flipV="0">
-            <a:off x="800100" y="1123950"/>
-            <a:ext cx="3419475" cy="4019550"/>
+            <a:off x="800100" y="1517100"/>
+            <a:ext cx="3419475" cy="3310649"/>
           </a:xfrm>
           <a:custGeom>
             <a:pathLst>
@@ -30272,7 +30272,7 @@
         </p:nvSpPr>
         <p:spPr>
           <a:xfrm rot="0" flipH="0" flipV="0">
-            <a:off x="962025" y="1266825"/>
+            <a:off x="962025" y="1659975"/>
             <a:ext cx="3095625" cy="152400"/>
           </a:xfrm>
           <a:prstGeom prst="rect"/>
@@ -30337,7 +30337,7 @@
         </p:nvSpPr>
         <p:spPr>
           <a:xfrm rot="0" flipH="0" flipV="0">
-            <a:off x="962025" y="1438275"/>
+            <a:off x="962025" y="1831425"/>
             <a:ext cx="3095625" cy="200025"/>
           </a:xfrm>
           <a:prstGeom prst="rect"/>
@@ -30386,7 +30386,7 @@
         </p:blipFill>
         <p:spPr>
           <a:xfrm rot="0" flipH="0" flipV="0">
-            <a:off x="1419225" y="2638425"/>
+            <a:off x="1419225" y="2323650"/>
             <a:ext cx="2190750" cy="914400"/>
           </a:xfrm>
           <a:prstGeom prst="rect">
@@ -30403,7 +30403,7 @@
         </p:nvSpPr>
         <p:spPr>
           <a:xfrm rot="0" flipH="0" flipV="0">
-            <a:off x="962025" y="4543425"/>
+            <a:off x="962025" y="4228650"/>
             <a:ext cx="3095625" cy="142875"/>
           </a:xfrm>
           <a:prstGeom prst="rect"/>
@@ -30438,7 +30438,7 @@
         </p:nvSpPr>
         <p:spPr>
           <a:xfrm rot="0" flipH="0" flipV="0">
-            <a:off x="962025" y="4733925"/>
+            <a:off x="962025" y="4419150"/>
             <a:ext cx="3095625" cy="228600"/>
           </a:xfrm>
           <a:prstGeom prst="rect"/>
@@ -30503,8 +30503,8 @@
         </p:nvSpPr>
         <p:spPr>
           <a:xfrm rot="0" flipH="0" flipV="0">
-            <a:off x="4391025" y="1123950"/>
-            <a:ext cx="3409950" cy="4019550"/>
+            <a:off x="4391025" y="1517100"/>
+            <a:ext cx="3409950" cy="3310649"/>
           </a:xfrm>
           <a:prstGeom prst="roundRect">
             <a:avLst>
@@ -30529,8 +30529,8 @@
         </p:nvSpPr>
         <p:spPr>
           <a:xfrm rot="0" flipH="0" flipV="0">
-            <a:off x="4391025" y="1123950"/>
-            <a:ext cx="3409950" cy="4019550"/>
+            <a:off x="4391025" y="1517100"/>
+            <a:ext cx="3409950" cy="3310649"/>
           </a:xfrm>
           <a:custGeom>
             <a:pathLst>
@@ -30586,7 +30586,7 @@
         </p:nvSpPr>
         <p:spPr>
           <a:xfrm rot="0" flipH="0" flipV="0">
-            <a:off x="4552950" y="1266825"/>
+            <a:off x="4552950" y="1659975"/>
             <a:ext cx="3086100" cy="152400"/>
           </a:xfrm>
           <a:prstGeom prst="rect"/>
@@ -30651,7 +30651,7 @@
         </p:nvSpPr>
         <p:spPr>
           <a:xfrm rot="0" flipH="0" flipV="0">
-            <a:off x="4552950" y="1438275"/>
+            <a:off x="4552950" y="1831425"/>
             <a:ext cx="3086100" cy="200025"/>
           </a:xfrm>
           <a:prstGeom prst="rect"/>
@@ -30700,7 +30700,7 @@
         </p:blipFill>
         <p:spPr>
           <a:xfrm rot="0" flipH="0" flipV="0">
-            <a:off x="5000625" y="2562225"/>
+            <a:off x="5000625" y="2247449"/>
             <a:ext cx="2190750" cy="914400"/>
           </a:xfrm>
           <a:prstGeom prst="rect">
@@ -30717,7 +30717,7 @@
         </p:nvSpPr>
         <p:spPr>
           <a:xfrm rot="0" flipH="0" flipV="0">
-            <a:off x="4552950" y="4400550"/>
+            <a:off x="4552950" y="4085775"/>
             <a:ext cx="3086100" cy="285750"/>
           </a:xfrm>
           <a:prstGeom prst="rect"/>
@@ -30754,7 +30754,7 @@
         </p:nvSpPr>
         <p:spPr>
           <a:xfrm rot="0" flipH="0" flipV="0">
-            <a:off x="4552950" y="4733925"/>
+            <a:off x="4552950" y="4419150"/>
             <a:ext cx="3086100" cy="228600"/>
           </a:xfrm>
           <a:prstGeom prst="rect"/>
@@ -30839,8 +30839,8 @@
         </p:nvSpPr>
         <p:spPr>
           <a:xfrm rot="0" flipH="0" flipV="0">
-            <a:off x="7972425" y="1123950"/>
-            <a:ext cx="3419475" cy="4019550"/>
+            <a:off x="7972425" y="1517100"/>
+            <a:ext cx="3419475" cy="3310649"/>
           </a:xfrm>
           <a:prstGeom prst="roundRect">
             <a:avLst>
@@ -30865,8 +30865,8 @@
         </p:nvSpPr>
         <p:spPr>
           <a:xfrm rot="0" flipH="0" flipV="0">
-            <a:off x="7972425" y="1123950"/>
-            <a:ext cx="3419475" cy="4019550"/>
+            <a:off x="7972425" y="1517100"/>
+            <a:ext cx="3419475" cy="3310649"/>
           </a:xfrm>
           <a:custGeom>
             <a:pathLst>
@@ -30922,7 +30922,7 @@
         </p:nvSpPr>
         <p:spPr>
           <a:xfrm rot="0" flipH="0" flipV="0">
-            <a:off x="8134350" y="1266825"/>
+            <a:off x="8134350" y="1659975"/>
             <a:ext cx="3095625" cy="152400"/>
           </a:xfrm>
           <a:prstGeom prst="rect"/>
@@ -30987,7 +30987,7 @@
         </p:nvSpPr>
         <p:spPr>
           <a:xfrm rot="0" flipH="0" flipV="0">
-            <a:off x="8134350" y="1438275"/>
+            <a:off x="8134350" y="1831425"/>
             <a:ext cx="3095625" cy="200025"/>
           </a:xfrm>
           <a:prstGeom prst="rect"/>
@@ -31036,7 +31036,7 @@
         </p:blipFill>
         <p:spPr>
           <a:xfrm rot="0" flipH="0" flipV="0">
-            <a:off x="8591550" y="2638425"/>
+            <a:off x="8591550" y="2323650"/>
             <a:ext cx="2190750" cy="914400"/>
           </a:xfrm>
           <a:prstGeom prst="rect">
@@ -31053,7 +31053,7 @@
         </p:nvSpPr>
         <p:spPr>
           <a:xfrm rot="0" flipH="0" flipV="0">
-            <a:off x="8134350" y="4543425"/>
+            <a:off x="8134350" y="4228650"/>
             <a:ext cx="3095625" cy="142875"/>
           </a:xfrm>
           <a:prstGeom prst="rect"/>
@@ -31088,7 +31088,7 @@
         </p:nvSpPr>
         <p:spPr>
           <a:xfrm rot="0" flipH="0" flipV="0">
-            <a:off x="8134350" y="4733925"/>
+            <a:off x="8134350" y="4419150"/>
             <a:ext cx="3095625" cy="228600"/>
           </a:xfrm>
           <a:prstGeom prst="rect"/>
@@ -31153,7 +31153,7 @@
         </p:nvSpPr>
         <p:spPr>
           <a:xfrm rot="0" flipH="0" flipV="0">
-            <a:off x="800100" y="5238750"/>
+            <a:off x="800100" y="4923000"/>
             <a:ext cx="6438900" cy="723900"/>
           </a:xfrm>
           <a:prstGeom prst="roundRect">
@@ -31184,7 +31184,7 @@
         </p:nvSpPr>
         <p:spPr>
           <a:xfrm rot="0" flipH="0" flipV="0">
-            <a:off x="990600" y="5353050"/>
+            <a:off x="990600" y="5037299"/>
             <a:ext cx="6057900" cy="495300"/>
           </a:xfrm>
           <a:prstGeom prst="rect"/>
@@ -31301,7 +31301,7 @@
         </p:nvSpPr>
         <p:spPr>
           <a:xfrm rot="0" flipH="0" flipV="0">
-            <a:off x="7391400" y="5238750"/>
+            <a:off x="7391400" y="4923000"/>
             <a:ext cx="4000500" cy="723900"/>
           </a:xfrm>
           <a:custGeom>
@@ -31341,7 +31341,7 @@
         </p:nvSpPr>
         <p:spPr>
           <a:xfrm rot="0" flipH="0" flipV="0">
-            <a:off x="7562850" y="5334000"/>
+            <a:off x="7562850" y="5018249"/>
             <a:ext cx="3829050" cy="533400"/>
           </a:xfrm>
           <a:prstGeom prst="rect"/>
@@ -36786,8 +36786,8 @@
         </p:nvSpPr>
         <p:spPr>
           <a:xfrm rot="0" flipH="0" flipV="0">
-            <a:off x="800100" y="1143000"/>
-            <a:ext cx="3419475" cy="4210050"/>
+            <a:off x="800100" y="1421850"/>
+            <a:ext cx="3419475" cy="3729750"/>
           </a:xfrm>
           <a:prstGeom prst="roundRect">
             <a:avLst>
@@ -36812,8 +36812,8 @@
         </p:nvSpPr>
         <p:spPr>
           <a:xfrm rot="0" flipH="0" flipV="0">
-            <a:off x="800100" y="1143000"/>
-            <a:ext cx="3419475" cy="4210050"/>
+            <a:off x="800100" y="1421850"/>
+            <a:ext cx="3419475" cy="3729750"/>
           </a:xfrm>
           <a:custGeom>
             <a:pathLst>
@@ -36869,7 +36869,7 @@
         </p:nvSpPr>
         <p:spPr>
           <a:xfrm rot="0" flipH="0" flipV="0">
-            <a:off x="990600" y="1314450"/>
+            <a:off x="990600" y="1593300"/>
             <a:ext cx="3038475" cy="161925"/>
           </a:xfrm>
           <a:prstGeom prst="rect"/>
@@ -36914,7 +36914,7 @@
         </p:nvSpPr>
         <p:spPr>
           <a:xfrm rot="0" flipH="0" flipV="0">
-            <a:off x="990600" y="1533525"/>
+            <a:off x="990600" y="1812375"/>
             <a:ext cx="3038475" cy="590550"/>
           </a:xfrm>
           <a:prstGeom prst="rect"/>
@@ -37001,7 +37001,7 @@
         </p:nvSpPr>
         <p:spPr>
           <a:xfrm rot="0" flipH="0" flipV="0">
-            <a:off x="990600" y="2790825"/>
+            <a:off x="990600" y="2618925"/>
             <a:ext cx="3038475" cy="342900"/>
           </a:xfrm>
           <a:prstGeom prst="roundRect">
@@ -37032,7 +37032,7 @@
         </p:nvSpPr>
         <p:spPr>
           <a:xfrm rot="0" flipH="0" flipV="0">
-            <a:off x="1123950" y="2876550"/>
+            <a:off x="1123950" y="2704650"/>
             <a:ext cx="2771775" cy="171450"/>
           </a:xfrm>
           <a:prstGeom prst="rect"/>
@@ -37077,7 +37077,7 @@
         </p:nvSpPr>
         <p:spPr>
           <a:xfrm rot="0" flipH="0" flipV="0">
-            <a:off x="990600" y="3790950"/>
+            <a:off x="990600" y="3619050"/>
             <a:ext cx="3038475" cy="342900"/>
           </a:xfrm>
           <a:prstGeom prst="roundRect">
@@ -37108,7 +37108,7 @@
         </p:nvSpPr>
         <p:spPr>
           <a:xfrm rot="0" flipH="0" flipV="0">
-            <a:off x="1123950" y="3876675"/>
+            <a:off x="1123950" y="3704774"/>
             <a:ext cx="2771775" cy="171450"/>
           </a:xfrm>
           <a:prstGeom prst="rect"/>
@@ -37203,7 +37203,7 @@
         </p:nvSpPr>
         <p:spPr>
           <a:xfrm rot="0" flipH="0" flipV="0">
-            <a:off x="990600" y="4800600"/>
+            <a:off x="990600" y="4628700"/>
             <a:ext cx="3038475" cy="342900"/>
           </a:xfrm>
           <a:prstGeom prst="roundRect">
@@ -37234,7 +37234,7 @@
         </p:nvSpPr>
         <p:spPr>
           <a:xfrm rot="0" flipH="0" flipV="0">
-            <a:off x="1123950" y="4886325"/>
+            <a:off x="1123950" y="4714425"/>
             <a:ext cx="2771775" cy="171450"/>
           </a:xfrm>
           <a:prstGeom prst="rect"/>
@@ -37289,8 +37289,8 @@
         </p:nvSpPr>
         <p:spPr>
           <a:xfrm rot="0" flipH="0" flipV="0">
-            <a:off x="4391025" y="1143000"/>
-            <a:ext cx="3409950" cy="4210050"/>
+            <a:off x="4391025" y="1421850"/>
+            <a:ext cx="3409950" cy="3729750"/>
           </a:xfrm>
           <a:prstGeom prst="roundRect">
             <a:avLst>
@@ -37315,8 +37315,8 @@
         </p:nvSpPr>
         <p:spPr>
           <a:xfrm rot="0" flipH="0" flipV="0">
-            <a:off x="4391025" y="1143000"/>
-            <a:ext cx="3409950" cy="4210050"/>
+            <a:off x="4391025" y="1421850"/>
+            <a:ext cx="3409950" cy="3729750"/>
           </a:xfrm>
           <a:custGeom>
             <a:pathLst>
@@ -37372,7 +37372,7 @@
         </p:nvSpPr>
         <p:spPr>
           <a:xfrm rot="0" flipH="0" flipV="0">
-            <a:off x="4581525" y="1314450"/>
+            <a:off x="4581525" y="1593300"/>
             <a:ext cx="3028950" cy="161925"/>
           </a:xfrm>
           <a:prstGeom prst="rect"/>
@@ -37417,7 +37417,7 @@
         </p:nvSpPr>
         <p:spPr>
           <a:xfrm rot="0" flipH="0" flipV="0">
-            <a:off x="4581525" y="1533525"/>
+            <a:off x="4581525" y="1812375"/>
             <a:ext cx="3028950" cy="590550"/>
           </a:xfrm>
           <a:prstGeom prst="rect"/>
@@ -37484,7 +37484,7 @@
         </p:nvSpPr>
         <p:spPr>
           <a:xfrm rot="0" flipH="0" flipV="0">
-            <a:off x="4581525" y="2790825"/>
+            <a:off x="4581525" y="2618925"/>
             <a:ext cx="3028950" cy="342900"/>
           </a:xfrm>
           <a:prstGeom prst="roundRect">
@@ -37515,7 +37515,7 @@
         </p:nvSpPr>
         <p:spPr>
           <a:xfrm rot="0" flipH="0" flipV="0">
-            <a:off x="4714875" y="2876550"/>
+            <a:off x="4714875" y="2704650"/>
             <a:ext cx="2762250" cy="171450"/>
           </a:xfrm>
           <a:prstGeom prst="rect"/>
@@ -37560,7 +37560,7 @@
         </p:nvSpPr>
         <p:spPr>
           <a:xfrm rot="0" flipH="0" flipV="0">
-            <a:off x="4581525" y="3790950"/>
+            <a:off x="4581525" y="3619050"/>
             <a:ext cx="3028950" cy="342900"/>
           </a:xfrm>
           <a:prstGeom prst="roundRect">
@@ -37591,7 +37591,7 @@
         </p:nvSpPr>
         <p:spPr>
           <a:xfrm rot="0" flipH="0" flipV="0">
-            <a:off x="4714875" y="3876675"/>
+            <a:off x="4714875" y="3704774"/>
             <a:ext cx="2762250" cy="171450"/>
           </a:xfrm>
           <a:prstGeom prst="rect"/>
@@ -37646,7 +37646,7 @@
         </p:nvSpPr>
         <p:spPr>
           <a:xfrm rot="0" flipH="0" flipV="0">
-            <a:off x="4581525" y="4800600"/>
+            <a:off x="4581525" y="4628700"/>
             <a:ext cx="3028950" cy="342900"/>
           </a:xfrm>
           <a:prstGeom prst="roundRect">
@@ -37677,7 +37677,7 @@
         </p:nvSpPr>
         <p:spPr>
           <a:xfrm rot="0" flipH="0" flipV="0">
-            <a:off x="4714875" y="4886325"/>
+            <a:off x="4714875" y="4714425"/>
             <a:ext cx="2762250" cy="171450"/>
           </a:xfrm>
           <a:prstGeom prst="rect"/>
@@ -37722,8 +37722,8 @@
         </p:nvSpPr>
         <p:spPr>
           <a:xfrm rot="0" flipH="0" flipV="0">
-            <a:off x="7972425" y="1143000"/>
-            <a:ext cx="3419475" cy="4210050"/>
+            <a:off x="7972425" y="1421850"/>
+            <a:ext cx="3419475" cy="3729750"/>
           </a:xfrm>
           <a:prstGeom prst="roundRect">
             <a:avLst>
@@ -37748,8 +37748,8 @@
         </p:nvSpPr>
         <p:spPr>
           <a:xfrm rot="0" flipH="0" flipV="0">
-            <a:off x="7972425" y="1143000"/>
-            <a:ext cx="3419475" cy="4210050"/>
+            <a:off x="7972425" y="1421850"/>
+            <a:ext cx="3419475" cy="3729750"/>
           </a:xfrm>
           <a:custGeom>
             <a:pathLst>
@@ -37805,7 +37805,7 @@
         </p:nvSpPr>
         <p:spPr>
           <a:xfrm rot="0" flipH="0" flipV="0">
-            <a:off x="8162925" y="1314450"/>
+            <a:off x="8162925" y="1593300"/>
             <a:ext cx="3038475" cy="161925"/>
           </a:xfrm>
           <a:prstGeom prst="rect"/>
@@ -37850,7 +37850,7 @@
         </p:nvSpPr>
         <p:spPr>
           <a:xfrm rot="0" flipH="0" flipV="0">
-            <a:off x="8162925" y="1533525"/>
+            <a:off x="8162925" y="1812375"/>
             <a:ext cx="3038475" cy="590550"/>
           </a:xfrm>
           <a:prstGeom prst="rect"/>
@@ -37887,7 +37887,7 @@
         </p:nvSpPr>
         <p:spPr>
           <a:xfrm rot="0" flipH="0" flipV="0">
-            <a:off x="8162925" y="3152775"/>
+            <a:off x="8162925" y="2980875"/>
             <a:ext cx="3038475" cy="819150"/>
           </a:xfrm>
           <a:prstGeom prst="roundRect">
@@ -37913,7 +37913,7 @@
         </p:nvSpPr>
         <p:spPr>
           <a:xfrm rot="0" flipH="0" flipV="0">
-            <a:off x="8315325" y="3286125"/>
+            <a:off x="8315325" y="3114225"/>
             <a:ext cx="2733675" cy="552450"/>
           </a:xfrm>
           <a:prstGeom prst="rect"/>
@@ -38020,7 +38020,7 @@
         </p:nvSpPr>
         <p:spPr>
           <a:xfrm rot="0" flipH="0" flipV="0">
-            <a:off x="8162925" y="4991100"/>
+            <a:off x="8162925" y="4819200"/>
             <a:ext cx="3038475" cy="152400"/>
           </a:xfrm>
           <a:prstGeom prst="rect"/>
@@ -38055,7 +38055,7 @@
         </p:nvSpPr>
         <p:spPr>
           <a:xfrm rot="0" flipH="0" flipV="0">
-            <a:off x="800100" y="5505450"/>
+            <a:off x="800100" y="5304000"/>
             <a:ext cx="1619250" cy="381000"/>
           </a:xfrm>
           <a:prstGeom prst="roundRect">
@@ -38081,7 +38081,7 @@
         </p:nvSpPr>
         <p:spPr>
           <a:xfrm rot="0" flipH="0" flipV="0">
-            <a:off x="952500" y="5610225"/>
+            <a:off x="952500" y="5408775"/>
             <a:ext cx="1314450" cy="171450"/>
           </a:xfrm>
           <a:prstGeom prst="rect"/>
@@ -38116,7 +38116,7 @@
         </p:nvSpPr>
         <p:spPr>
           <a:xfrm rot="0" flipH="0" flipV="0">
-            <a:off x="2571750" y="5448300"/>
+            <a:off x="2571750" y="5246850"/>
             <a:ext cx="8820150" cy="495300"/>
           </a:xfrm>
           <a:prstGeom prst="rect"/>
@@ -40533,7 +40533,7 @@
         </p:nvSpPr>
         <p:spPr>
           <a:xfrm rot="0" flipH="0" flipV="0">
-            <a:off x="800100" y="1104900"/>
+            <a:off x="800100" y="1681762"/>
             <a:ext cx="5753100" cy="209550"/>
           </a:xfrm>
           <a:prstGeom prst="rect"/>
@@ -40578,7 +40578,7 @@
         </p:nvSpPr>
         <p:spPr>
           <a:xfrm rot="0" flipH="0" flipV="0">
-            <a:off x="800100" y="1428750"/>
+            <a:off x="800100" y="2005612"/>
             <a:ext cx="5753100" cy="571500"/>
           </a:xfrm>
           <a:prstGeom prst="roundRect">
@@ -40623,7 +40623,7 @@
         </p:blipFill>
         <p:spPr>
           <a:xfrm rot="0" flipH="0" flipV="0">
-            <a:off x="952500" y="1552575"/>
+            <a:off x="952500" y="2129437"/>
             <a:ext cx="190500" cy="190500"/>
           </a:xfrm>
           <a:prstGeom prst="rect">
@@ -40640,7 +40640,7 @@
         </p:nvSpPr>
         <p:spPr>
           <a:xfrm rot="0" flipH="0" flipV="0">
-            <a:off x="1257300" y="1533525"/>
+            <a:off x="1257300" y="2110387"/>
             <a:ext cx="5143500" cy="190500"/>
           </a:xfrm>
           <a:prstGeom prst="rect"/>
@@ -40675,7 +40675,7 @@
         </p:nvSpPr>
         <p:spPr>
           <a:xfrm rot="0" flipH="0" flipV="0">
-            <a:off x="1257300" y="1733550"/>
+            <a:off x="1257300" y="2310412"/>
             <a:ext cx="5143500" cy="161925"/>
           </a:xfrm>
           <a:prstGeom prst="rect"/>
@@ -40710,7 +40710,7 @@
         </p:nvSpPr>
         <p:spPr>
           <a:xfrm rot="0" flipH="0" flipV="0">
-            <a:off x="800100" y="2114550"/>
+            <a:off x="800100" y="2691412"/>
             <a:ext cx="5753100" cy="571500"/>
           </a:xfrm>
           <a:prstGeom prst="roundRect">
@@ -40755,7 +40755,7 @@
         </p:blipFill>
         <p:spPr>
           <a:xfrm rot="0" flipH="0" flipV="0">
-            <a:off x="952500" y="2238375"/>
+            <a:off x="952500" y="2815237"/>
             <a:ext cx="190500" cy="190500"/>
           </a:xfrm>
           <a:prstGeom prst="rect">
@@ -40772,7 +40772,7 @@
         </p:nvSpPr>
         <p:spPr>
           <a:xfrm rot="0" flipH="0" flipV="0">
-            <a:off x="1257300" y="2219325"/>
+            <a:off x="1257300" y="2796187"/>
             <a:ext cx="5143500" cy="190500"/>
           </a:xfrm>
           <a:prstGeom prst="rect"/>
@@ -40817,7 +40817,7 @@
         </p:nvSpPr>
         <p:spPr>
           <a:xfrm rot="0" flipH="0" flipV="0">
-            <a:off x="1257300" y="2419350"/>
+            <a:off x="1257300" y="2996212"/>
             <a:ext cx="5143500" cy="161925"/>
           </a:xfrm>
           <a:prstGeom prst="rect"/>
@@ -40952,7 +40952,7 @@
         </p:nvSpPr>
         <p:spPr>
           <a:xfrm rot="0" flipH="0" flipV="0">
-            <a:off x="800100" y="2800350"/>
+            <a:off x="800100" y="3377212"/>
             <a:ext cx="5753100" cy="571500"/>
           </a:xfrm>
           <a:prstGeom prst="roundRect">
@@ -40997,7 +40997,7 @@
         </p:blipFill>
         <p:spPr>
           <a:xfrm rot="0" flipH="0" flipV="0">
-            <a:off x="952500" y="2924175"/>
+            <a:off x="952500" y="3501037"/>
             <a:ext cx="190500" cy="190500"/>
           </a:xfrm>
           <a:prstGeom prst="rect">
@@ -41014,7 +41014,7 @@
         </p:nvSpPr>
         <p:spPr>
           <a:xfrm rot="0" flipH="0" flipV="0">
-            <a:off x="1257300" y="2905125"/>
+            <a:off x="1257300" y="3481987"/>
             <a:ext cx="5143500" cy="190500"/>
           </a:xfrm>
           <a:prstGeom prst="rect"/>
@@ -41059,7 +41059,7 @@
         </p:nvSpPr>
         <p:spPr>
           <a:xfrm rot="0" flipH="0" flipV="0">
-            <a:off x="1257300" y="3105150"/>
+            <a:off x="1257300" y="3682012"/>
             <a:ext cx="5143500" cy="161925"/>
           </a:xfrm>
           <a:prstGeom prst="rect"/>
@@ -41094,7 +41094,7 @@
         </p:nvSpPr>
         <p:spPr>
           <a:xfrm rot="0" flipH="0" flipV="0">
-            <a:off x="800100" y="3486150"/>
+            <a:off x="800100" y="4063012"/>
             <a:ext cx="5753100" cy="571500"/>
           </a:xfrm>
           <a:prstGeom prst="roundRect">
@@ -41139,7 +41139,7 @@
         </p:blipFill>
         <p:spPr>
           <a:xfrm rot="0" flipH="0" flipV="0">
-            <a:off x="952500" y="3609975"/>
+            <a:off x="952500" y="4186837"/>
             <a:ext cx="190500" cy="190500"/>
           </a:xfrm>
           <a:prstGeom prst="rect">
@@ -41156,7 +41156,7 @@
         </p:nvSpPr>
         <p:spPr>
           <a:xfrm rot="0" flipH="0" flipV="0">
-            <a:off x="1257300" y="3590925"/>
+            <a:off x="1257300" y="4167787"/>
             <a:ext cx="5143500" cy="190500"/>
           </a:xfrm>
           <a:prstGeom prst="rect"/>
@@ -41191,7 +41191,7 @@
         </p:nvSpPr>
         <p:spPr>
           <a:xfrm rot="0" flipH="0" flipV="0">
-            <a:off x="1257300" y="3790950"/>
+            <a:off x="1257300" y="4367812"/>
             <a:ext cx="5143500" cy="161925"/>
           </a:xfrm>
           <a:prstGeom prst="rect"/>
@@ -41256,7 +41256,7 @@
         </p:nvSpPr>
         <p:spPr>
           <a:xfrm rot="0" flipH="0" flipV="0">
-            <a:off x="800100" y="4171950"/>
+            <a:off x="800100" y="4748812"/>
             <a:ext cx="5753100" cy="571500"/>
           </a:xfrm>
           <a:prstGeom prst="roundRect">
@@ -41301,7 +41301,7 @@
         </p:blipFill>
         <p:spPr>
           <a:xfrm rot="0" flipH="0" flipV="0">
-            <a:off x="952500" y="4295775"/>
+            <a:off x="952500" y="4872637"/>
             <a:ext cx="190500" cy="190500"/>
           </a:xfrm>
           <a:prstGeom prst="rect">
@@ -41318,7 +41318,7 @@
         </p:nvSpPr>
         <p:spPr>
           <a:xfrm rot="0" flipH="0" flipV="0">
-            <a:off x="1257300" y="4276725"/>
+            <a:off x="1257300" y="4853587"/>
             <a:ext cx="5143500" cy="190500"/>
           </a:xfrm>
           <a:prstGeom prst="rect"/>
@@ -41373,7 +41373,7 @@
         </p:nvSpPr>
         <p:spPr>
           <a:xfrm rot="0" flipH="0" flipV="0">
-            <a:off x="1257300" y="4476750"/>
+            <a:off x="1257300" y="5053612"/>
             <a:ext cx="5143500" cy="161925"/>
           </a:xfrm>
           <a:prstGeom prst="rect"/>
@@ -41428,7 +41428,7 @@
         </p:nvSpPr>
         <p:spPr>
           <a:xfrm rot="0" flipH="0" flipV="0">
-            <a:off x="6819900" y="1104900"/>
+            <a:off x="6819900" y="1681762"/>
             <a:ext cx="4572000" cy="209550"/>
           </a:xfrm>
           <a:prstGeom prst="rect"/>
@@ -41473,7 +41473,7 @@
         </p:nvSpPr>
         <p:spPr>
           <a:xfrm rot="0" flipH="0" flipV="0">
-            <a:off x="6819900" y="1447800"/>
+            <a:off x="6819900" y="2024662"/>
             <a:ext cx="4572000" cy="1809750"/>
           </a:xfrm>
           <a:prstGeom prst="roundRect">
@@ -41504,7 +41504,7 @@
         </p:nvSpPr>
         <p:spPr>
           <a:xfrm rot="0" flipH="0" flipV="0">
-            <a:off x="7029450" y="1638300"/>
+            <a:off x="7029450" y="2215162"/>
             <a:ext cx="419100" cy="285750"/>
           </a:xfrm>
           <a:prstGeom prst="roundRect">
@@ -41530,7 +41530,7 @@
         </p:nvSpPr>
         <p:spPr>
           <a:xfrm rot="0" flipH="0" flipV="0">
-            <a:off x="7153275" y="1704975"/>
+            <a:off x="7153275" y="2281837"/>
             <a:ext cx="180975" cy="161925"/>
           </a:xfrm>
           <a:prstGeom prst="rect"/>
@@ -41565,7 +41565,7 @@
         </p:nvSpPr>
         <p:spPr>
           <a:xfrm rot="0" flipH="0" flipV="0">
-            <a:off x="7562850" y="1695450"/>
+            <a:off x="7562850" y="2272312"/>
             <a:ext cx="714375" cy="171450"/>
           </a:xfrm>
           <a:prstGeom prst="rect"/>
@@ -41614,7 +41614,7 @@
         </p:blipFill>
         <p:spPr>
           <a:xfrm rot="0" flipH="0" flipV="0">
-            <a:off x="8391525" y="1714500"/>
+            <a:off x="8391525" y="2291362"/>
             <a:ext cx="142875" cy="142875"/>
           </a:xfrm>
           <a:prstGeom prst="rect">
@@ -41631,7 +41631,7 @@
         </p:nvSpPr>
         <p:spPr>
           <a:xfrm rot="0" flipH="0" flipV="0">
-            <a:off x="7029450" y="2019300"/>
+            <a:off x="7029450" y="2596162"/>
             <a:ext cx="419100" cy="285750"/>
           </a:xfrm>
           <a:prstGeom prst="roundRect">
@@ -41657,7 +41657,7 @@
         </p:nvSpPr>
         <p:spPr>
           <a:xfrm rot="0" flipH="0" flipV="0">
-            <a:off x="7143750" y="2085975"/>
+            <a:off x="7143750" y="2662837"/>
             <a:ext cx="200025" cy="161925"/>
           </a:xfrm>
           <a:prstGeom prst="rect"/>
@@ -41692,7 +41692,7 @@
         </p:nvSpPr>
         <p:spPr>
           <a:xfrm rot="0" flipH="0" flipV="0">
-            <a:off x="7562850" y="2076450"/>
+            <a:off x="7562850" y="2653312"/>
             <a:ext cx="1428750" cy="171450"/>
           </a:xfrm>
           <a:prstGeom prst="rect"/>
@@ -41727,7 +41727,7 @@
         </p:nvSpPr>
         <p:spPr>
           <a:xfrm rot="0" flipH="0" flipV="0">
-            <a:off x="9105900" y="2076450"/>
+            <a:off x="9105900" y="2653312"/>
             <a:ext cx="476250" cy="180975"/>
           </a:xfrm>
           <a:prstGeom prst="roundRect">
@@ -41753,7 +41753,7 @@
         </p:nvSpPr>
         <p:spPr>
           <a:xfrm rot="0" flipH="0" flipV="0">
-            <a:off x="9201150" y="2095500"/>
+            <a:off x="9201150" y="2672362"/>
             <a:ext cx="285750" cy="142875"/>
           </a:xfrm>
           <a:prstGeom prst="rect"/>
@@ -41788,7 +41788,7 @@
         </p:nvSpPr>
         <p:spPr>
           <a:xfrm rot="0" flipH="0" flipV="0">
-            <a:off x="7029450" y="2400300"/>
+            <a:off x="7029450" y="2977162"/>
             <a:ext cx="419100" cy="285750"/>
           </a:xfrm>
           <a:prstGeom prst="roundRect">
@@ -41814,7 +41814,7 @@
         </p:nvSpPr>
         <p:spPr>
           <a:xfrm rot="0" flipH="0" flipV="0">
-            <a:off x="7143750" y="2466975"/>
+            <a:off x="7143750" y="3043837"/>
             <a:ext cx="200025" cy="161925"/>
           </a:xfrm>
           <a:prstGeom prst="rect"/>
@@ -41849,7 +41849,7 @@
         </p:nvSpPr>
         <p:spPr>
           <a:xfrm rot="0" flipH="0" flipV="0">
-            <a:off x="7562850" y="2457450"/>
+            <a:off x="7562850" y="3034312"/>
             <a:ext cx="1524000" cy="171450"/>
           </a:xfrm>
           <a:prstGeom prst="rect"/>
@@ -41894,7 +41894,7 @@
         </p:nvSpPr>
         <p:spPr>
           <a:xfrm rot="0" flipH="0" flipV="0">
-            <a:off x="7029450" y="2781300"/>
+            <a:off x="7029450" y="3358162"/>
             <a:ext cx="419100" cy="285750"/>
           </a:xfrm>
           <a:prstGeom prst="roundRect">
@@ -41920,7 +41920,7 @@
         </p:nvSpPr>
         <p:spPr>
           <a:xfrm rot="0" flipH="0" flipV="0">
-            <a:off x="7143750" y="2847975"/>
+            <a:off x="7143750" y="3424837"/>
             <a:ext cx="200025" cy="161925"/>
           </a:xfrm>
           <a:prstGeom prst="rect"/>
@@ -41955,7 +41955,7 @@
         </p:nvSpPr>
         <p:spPr>
           <a:xfrm rot="0" flipH="0" flipV="0">
-            <a:off x="7562850" y="2838450"/>
+            <a:off x="7562850" y="3415312"/>
             <a:ext cx="1000125" cy="171450"/>
           </a:xfrm>
           <a:prstGeom prst="rect"/>
@@ -41990,7 +41990,7 @@
         </p:nvSpPr>
         <p:spPr>
           <a:xfrm rot="0" flipH="0" flipV="0">
-            <a:off x="6819900" y="3390900"/>
+            <a:off x="6819900" y="3967762"/>
             <a:ext cx="4572000" cy="1514475"/>
           </a:xfrm>
           <a:prstGeom prst="roundRect">
@@ -42016,7 +42016,7 @@
         </p:nvSpPr>
         <p:spPr>
           <a:xfrm rot="0" flipH="0" flipV="0">
-            <a:off x="7029450" y="3562350"/>
+            <a:off x="7029450" y="4139212"/>
             <a:ext cx="4152900" cy="200025"/>
           </a:xfrm>
           <a:prstGeom prst="rect"/>
@@ -42051,7 +42051,7 @@
         </p:nvSpPr>
         <p:spPr>
           <a:xfrm rot="0" flipH="0" flipV="0">
-            <a:off x="7029450" y="3857625"/>
+            <a:off x="7029450" y="4434487"/>
             <a:ext cx="228600" cy="228600"/>
           </a:xfrm>
           <a:prstGeom prst="roundRect">
@@ -42079,7 +42079,7 @@
         </p:nvSpPr>
         <p:spPr>
           <a:xfrm rot="0" flipH="0" flipV="0">
-            <a:off x="7115175" y="3895725"/>
+            <a:off x="7115175" y="4472587"/>
             <a:ext cx="57150" cy="152400"/>
           </a:xfrm>
           <a:prstGeom prst="rect"/>
@@ -42114,7 +42114,7 @@
         </p:nvSpPr>
         <p:spPr>
           <a:xfrm rot="0" flipH="0" flipV="0">
-            <a:off x="7353300" y="3886200"/>
+            <a:off x="7353300" y="4463062"/>
             <a:ext cx="2076450" cy="171450"/>
           </a:xfrm>
           <a:prstGeom prst="rect"/>
@@ -42175,7 +42175,7 @@
         </p:nvSpPr>
         <p:spPr>
           <a:xfrm rot="0" flipH="0" flipV="0">
-            <a:off x="7029450" y="4181475"/>
+            <a:off x="7029450" y="4758337"/>
             <a:ext cx="228600" cy="228600"/>
           </a:xfrm>
           <a:prstGeom prst="roundRect">
@@ -42203,7 +42203,7 @@
         </p:nvSpPr>
         <p:spPr>
           <a:xfrm rot="0" flipH="0" flipV="0">
-            <a:off x="7105650" y="4219575"/>
+            <a:off x="7105650" y="4796437"/>
             <a:ext cx="76200" cy="152400"/>
           </a:xfrm>
           <a:prstGeom prst="rect"/>
@@ -42238,7 +42238,7 @@
         </p:nvSpPr>
         <p:spPr>
           <a:xfrm rot="0" flipH="0" flipV="0">
-            <a:off x="7353300" y="4210050"/>
+            <a:off x="7353300" y="4786912"/>
             <a:ext cx="1809750" cy="171450"/>
           </a:xfrm>
           <a:prstGeom prst="rect"/>
@@ -42299,7 +42299,7 @@
         </p:nvSpPr>
         <p:spPr>
           <a:xfrm rot="0" flipH="0" flipV="0">
-            <a:off x="7029450" y="4505325"/>
+            <a:off x="7029450" y="5082187"/>
             <a:ext cx="228600" cy="228600"/>
           </a:xfrm>
           <a:prstGeom prst="roundRect">
@@ -42327,7 +42327,7 @@
         </p:nvSpPr>
         <p:spPr>
           <a:xfrm rot="0" flipH="0" flipV="0">
-            <a:off x="7105650" y="4543425"/>
+            <a:off x="7105650" y="5120287"/>
             <a:ext cx="76200" cy="152400"/>
           </a:xfrm>
           <a:prstGeom prst="rect"/>
@@ -42362,7 +42362,7 @@
         </p:nvSpPr>
         <p:spPr>
           <a:xfrm rot="0" flipH="0" flipV="0">
-            <a:off x="7353300" y="4533900"/>
+            <a:off x="7353300" y="5110762"/>
             <a:ext cx="1571625" cy="171450"/>
           </a:xfrm>
           <a:prstGeom prst="rect"/>
@@ -44669,8 +44669,8 @@
         </p:nvSpPr>
         <p:spPr>
           <a:xfrm rot="0" flipH="0" flipV="0">
-            <a:off x="800100" y="1123950"/>
-            <a:ext cx="3400425" cy="3924300"/>
+            <a:off x="800100" y="2055263"/>
+            <a:ext cx="3400425" cy="2139074"/>
           </a:xfrm>
           <a:prstGeom prst="roundRect">
             <a:avLst>
@@ -44695,8 +44695,8 @@
         </p:nvSpPr>
         <p:spPr>
           <a:xfrm rot="0" flipH="0" flipV="0">
-            <a:off x="800100" y="1123950"/>
-            <a:ext cx="3400425" cy="3924300"/>
+            <a:off x="800100" y="2055263"/>
+            <a:ext cx="3400425" cy="2139074"/>
           </a:xfrm>
           <a:custGeom>
             <a:pathLst>
@@ -44752,7 +44752,7 @@
         </p:nvSpPr>
         <p:spPr>
           <a:xfrm rot="0" flipH="0" flipV="0">
-            <a:off x="990600" y="1295400"/>
+            <a:off x="990600" y="2226713"/>
             <a:ext cx="381000" cy="381000"/>
           </a:xfrm>
           <a:prstGeom prst="roundRect">
@@ -44792,7 +44792,7 @@
         </p:blipFill>
         <p:spPr>
           <a:xfrm rot="0" flipH="0" flipV="0">
-            <a:off x="1085850" y="1390650"/>
+            <a:off x="1085850" y="2321963"/>
             <a:ext cx="190500" cy="190500"/>
           </a:xfrm>
           <a:prstGeom prst="rect">
@@ -44809,7 +44809,7 @@
         </p:nvSpPr>
         <p:spPr>
           <a:xfrm rot="0" flipH="0" flipV="0">
-            <a:off x="1485900" y="1304925"/>
+            <a:off x="1485900" y="2236238"/>
             <a:ext cx="904875" cy="219075"/>
           </a:xfrm>
           <a:prstGeom prst="rect"/>
@@ -44844,7 +44844,7 @@
         </p:nvSpPr>
         <p:spPr>
           <a:xfrm rot="0" flipH="0" flipV="0">
-            <a:off x="1485900" y="1524000"/>
+            <a:off x="1485900" y="2455313"/>
             <a:ext cx="904875" cy="152400"/>
           </a:xfrm>
           <a:prstGeom prst="rect"/>
@@ -44879,7 +44879,7 @@
         </p:nvSpPr>
         <p:spPr>
           <a:xfrm rot="0" flipH="0" flipV="0">
-            <a:off x="990600" y="1790700"/>
+            <a:off x="990600" y="2722013"/>
             <a:ext cx="3019425" cy="533400"/>
           </a:xfrm>
           <a:prstGeom prst="rect"/>
@@ -44936,7 +44936,7 @@
         </p:nvSpPr>
         <p:spPr>
           <a:xfrm rot="0" flipH="0" flipV="0">
-            <a:off x="990600" y="4295775"/>
+            <a:off x="990600" y="3471412"/>
             <a:ext cx="3019425" cy="542925"/>
           </a:xfrm>
           <a:prstGeom prst="roundRect">
@@ -44962,7 +44962,7 @@
         </p:nvSpPr>
         <p:spPr>
           <a:xfrm rot="0" flipH="0" flipV="0">
-            <a:off x="1123950" y="4391025"/>
+            <a:off x="1123950" y="3566662"/>
             <a:ext cx="2752725" cy="152400"/>
           </a:xfrm>
           <a:prstGeom prst="rect"/>
@@ -45007,7 +45007,7 @@
         </p:nvSpPr>
         <p:spPr>
           <a:xfrm rot="0" flipH="0" flipV="0">
-            <a:off x="1123950" y="4572000"/>
+            <a:off x="1123950" y="3747637"/>
             <a:ext cx="2752725" cy="171450"/>
           </a:xfrm>
           <a:prstGeom prst="rect"/>
@@ -45062,8 +45062,8 @@
         </p:nvSpPr>
         <p:spPr>
           <a:xfrm rot="0" flipH="0" flipV="0">
-            <a:off x="4391025" y="1123950"/>
-            <a:ext cx="3409950" cy="3924300"/>
+            <a:off x="4391025" y="2055263"/>
+            <a:ext cx="3409950" cy="2139074"/>
           </a:xfrm>
           <a:prstGeom prst="roundRect">
             <a:avLst>
@@ -45088,8 +45088,8 @@
         </p:nvSpPr>
         <p:spPr>
           <a:xfrm rot="0" flipH="0" flipV="0">
-            <a:off x="4391025" y="1123950"/>
-            <a:ext cx="3409950" cy="3924300"/>
+            <a:off x="4391025" y="2055263"/>
+            <a:ext cx="3409950" cy="2139074"/>
           </a:xfrm>
           <a:custGeom>
             <a:pathLst>
@@ -45145,7 +45145,7 @@
         </p:nvSpPr>
         <p:spPr>
           <a:xfrm rot="0" flipH="0" flipV="0">
-            <a:off x="4581525" y="1295400"/>
+            <a:off x="4581525" y="2226713"/>
             <a:ext cx="381000" cy="381000"/>
           </a:xfrm>
           <a:prstGeom prst="roundRect">
@@ -45185,7 +45185,7 @@
         </p:blipFill>
         <p:spPr>
           <a:xfrm rot="0" flipH="0" flipV="0">
-            <a:off x="4676775" y="1390650"/>
+            <a:off x="4676775" y="2321963"/>
             <a:ext cx="190500" cy="190500"/>
           </a:xfrm>
           <a:prstGeom prst="rect">
@@ -45202,7 +45202,7 @@
         </p:nvSpPr>
         <p:spPr>
           <a:xfrm rot="0" flipH="0" flipV="0">
-            <a:off x="5076825" y="1304925"/>
+            <a:off x="5076825" y="2236238"/>
             <a:ext cx="1085850" cy="219075"/>
           </a:xfrm>
           <a:prstGeom prst="rect"/>
@@ -45237,7 +45237,7 @@
         </p:nvSpPr>
         <p:spPr>
           <a:xfrm rot="0" flipH="0" flipV="0">
-            <a:off x="5076825" y="1524000"/>
+            <a:off x="5076825" y="2455313"/>
             <a:ext cx="1085850" cy="152400"/>
           </a:xfrm>
           <a:prstGeom prst="rect"/>
@@ -45272,7 +45272,7 @@
         </p:nvSpPr>
         <p:spPr>
           <a:xfrm rot="0" flipH="0" flipV="0">
-            <a:off x="4581525" y="1790700"/>
+            <a:off x="4581525" y="2722013"/>
             <a:ext cx="3028950" cy="266700"/>
           </a:xfrm>
           <a:prstGeom prst="rect"/>
@@ -45307,7 +45307,7 @@
         </p:nvSpPr>
         <p:spPr>
           <a:xfrm rot="0" flipH="0" flipV="0">
-            <a:off x="4581525" y="4295775"/>
+            <a:off x="4581525" y="3471412"/>
             <a:ext cx="3028950" cy="542925"/>
           </a:xfrm>
           <a:prstGeom prst="roundRect">
@@ -45333,7 +45333,7 @@
         </p:nvSpPr>
         <p:spPr>
           <a:xfrm rot="0" flipH="0" flipV="0">
-            <a:off x="4714875" y="4391025"/>
+            <a:off x="4714875" y="3566662"/>
             <a:ext cx="2762250" cy="152400"/>
           </a:xfrm>
           <a:prstGeom prst="rect"/>
@@ -45378,7 +45378,7 @@
         </p:nvSpPr>
         <p:spPr>
           <a:xfrm rot="0" flipH="0" flipV="0">
-            <a:off x="4714875" y="4572000"/>
+            <a:off x="4714875" y="3747637"/>
             <a:ext cx="2762250" cy="171450"/>
           </a:xfrm>
           <a:prstGeom prst="rect"/>
@@ -45453,8 +45453,8 @@
         </p:nvSpPr>
         <p:spPr>
           <a:xfrm rot="0" flipH="0" flipV="0">
-            <a:off x="7991475" y="1123950"/>
-            <a:ext cx="3400425" cy="3924300"/>
+            <a:off x="7991475" y="2055263"/>
+            <a:ext cx="3400425" cy="2139074"/>
           </a:xfrm>
           <a:prstGeom prst="roundRect">
             <a:avLst>
@@ -45479,8 +45479,8 @@
         </p:nvSpPr>
         <p:spPr>
           <a:xfrm rot="0" flipH="0" flipV="0">
-            <a:off x="7991475" y="1123950"/>
-            <a:ext cx="3400425" cy="3924300"/>
+            <a:off x="7991475" y="2055263"/>
+            <a:ext cx="3400425" cy="2139074"/>
           </a:xfrm>
           <a:custGeom>
             <a:pathLst>
@@ -45536,7 +45536,7 @@
         </p:nvSpPr>
         <p:spPr>
           <a:xfrm rot="0" flipH="0" flipV="0">
-            <a:off x="8181975" y="1295400"/>
+            <a:off x="8181975" y="2226713"/>
             <a:ext cx="381000" cy="381000"/>
           </a:xfrm>
           <a:prstGeom prst="roundRect">
@@ -45576,7 +45576,7 @@
         </p:blipFill>
         <p:spPr>
           <a:xfrm rot="0" flipH="0" flipV="0">
-            <a:off x="8277225" y="1390650"/>
+            <a:off x="8277225" y="2321963"/>
             <a:ext cx="190500" cy="190500"/>
           </a:xfrm>
           <a:prstGeom prst="rect">
@@ -45593,7 +45593,7 @@
         </p:nvSpPr>
         <p:spPr>
           <a:xfrm rot="0" flipH="0" flipV="0">
-            <a:off x="8677275" y="1304925"/>
+            <a:off x="8677275" y="2236238"/>
             <a:ext cx="1085850" cy="219075"/>
           </a:xfrm>
           <a:prstGeom prst="rect"/>
@@ -45628,7 +45628,7 @@
         </p:nvSpPr>
         <p:spPr>
           <a:xfrm rot="0" flipH="0" flipV="0">
-            <a:off x="8677275" y="1524000"/>
+            <a:off x="8677275" y="2455313"/>
             <a:ext cx="1085850" cy="152400"/>
           </a:xfrm>
           <a:prstGeom prst="rect"/>
@@ -45663,7 +45663,7 @@
         </p:nvSpPr>
         <p:spPr>
           <a:xfrm rot="0" flipH="0" flipV="0">
-            <a:off x="8181975" y="1790700"/>
+            <a:off x="8181975" y="2722013"/>
             <a:ext cx="3019425" cy="266700"/>
           </a:xfrm>
           <a:prstGeom prst="rect"/>
@@ -45718,7 +45718,7 @@
         </p:nvSpPr>
         <p:spPr>
           <a:xfrm rot="0" flipH="0" flipV="0">
-            <a:off x="8181975" y="4295775"/>
+            <a:off x="8181975" y="3471412"/>
             <a:ext cx="3019425" cy="542925"/>
           </a:xfrm>
           <a:prstGeom prst="roundRect">
@@ -45744,7 +45744,7 @@
         </p:nvSpPr>
         <p:spPr>
           <a:xfrm rot="0" flipH="0" flipV="0">
-            <a:off x="8315325" y="4391025"/>
+            <a:off x="8315325" y="3566662"/>
             <a:ext cx="2752725" cy="152400"/>
           </a:xfrm>
           <a:prstGeom prst="rect"/>
@@ -45789,7 +45789,7 @@
         </p:nvSpPr>
         <p:spPr>
           <a:xfrm rot="0" flipH="0" flipV="0">
-            <a:off x="8315325" y="4572000"/>
+            <a:off x="8315325" y="3747637"/>
             <a:ext cx="2752725" cy="171450"/>
           </a:xfrm>
           <a:prstGeom prst="rect"/>
@@ -45884,7 +45884,7 @@
         </p:nvSpPr>
         <p:spPr>
           <a:xfrm rot="0" flipH="0" flipV="0">
-            <a:off x="800100" y="5162550"/>
+            <a:off x="800100" y="4308637"/>
             <a:ext cx="5200650" cy="800100"/>
           </a:xfrm>
           <a:prstGeom prst="roundRect">
@@ -45915,7 +45915,7 @@
         </p:nvSpPr>
         <p:spPr>
           <a:xfrm rot="0" flipH="0" flipV="0">
-            <a:off x="990600" y="5286375"/>
+            <a:off x="990600" y="4432462"/>
             <a:ext cx="4819650" cy="552450"/>
           </a:xfrm>
           <a:prstGeom prst="rect"/>
@@ -46042,7 +46042,7 @@
         </p:nvSpPr>
         <p:spPr>
           <a:xfrm rot="0" flipH="0" flipV="0">
-            <a:off x="6191250" y="5162550"/>
+            <a:off x="6191250" y="4308637"/>
             <a:ext cx="5238750" cy="800100"/>
           </a:xfrm>
           <a:custGeom>
@@ -46082,7 +46082,7 @@
         </p:nvSpPr>
         <p:spPr>
           <a:xfrm rot="0" flipH="0" flipV="0">
-            <a:off x="6362700" y="5286375"/>
+            <a:off x="6362700" y="4432462"/>
             <a:ext cx="5029200" cy="552450"/>
           </a:xfrm>
           <a:prstGeom prst="rect"/>
@@ -46145,7 +46145,7 @@
                 <a:latin typeface="Source Han Sans SC"/>
                 <a:ea typeface="Source Han Sans SC"/>
               </a:rPr>
-              <a:t>Sources set the ceiling of quality.</a:t>
+              <a:t/>
             </a:r>
             <a:endParaRPr/>
           </a:p>
@@ -46381,7 +46381,7 @@
         </p:nvSpPr>
         <p:spPr>
           <a:xfrm rot="0" flipH="0" flipV="0">
-            <a:off x="800100" y="1104900"/>
+            <a:off x="800100" y="1519837"/>
             <a:ext cx="5829300" cy="209550"/>
           </a:xfrm>
           <a:prstGeom prst="rect"/>
@@ -46436,7 +46436,7 @@
         </p:nvSpPr>
         <p:spPr>
           <a:xfrm rot="0" flipH="0" flipV="0">
-            <a:off x="800100" y="1428750"/>
+            <a:off x="800100" y="1843687"/>
             <a:ext cx="5829300" cy="1695450"/>
           </a:xfrm>
           <a:prstGeom prst="roundRect">
@@ -46467,7 +46467,7 @@
         </p:nvSpPr>
         <p:spPr>
           <a:xfrm rot="0" flipH="0" flipV="0">
-            <a:off x="1009650" y="1609725"/>
+            <a:off x="1009650" y="2024662"/>
             <a:ext cx="495300" cy="228600"/>
           </a:xfrm>
           <a:prstGeom prst="roundRect">
@@ -46493,7 +46493,7 @@
         </p:nvSpPr>
         <p:spPr>
           <a:xfrm rot="0" flipH="0" flipV="0">
-            <a:off x="1143000" y="1657350"/>
+            <a:off x="1143000" y="2072287"/>
             <a:ext cx="238125" cy="142875"/>
           </a:xfrm>
           <a:prstGeom prst="rect"/>
@@ -46528,7 +46528,7 @@
         </p:nvSpPr>
         <p:spPr>
           <a:xfrm rot="0" flipH="0" flipV="0">
-            <a:off x="1619250" y="1600200"/>
+            <a:off x="1619250" y="2015137"/>
             <a:ext cx="4800600" cy="266700"/>
           </a:xfrm>
           <a:prstGeom prst="rect"/>
@@ -46583,7 +46583,7 @@
         </p:nvSpPr>
         <p:spPr>
           <a:xfrm rot="0" flipH="0" flipV="0">
-            <a:off x="1009650" y="1971675"/>
+            <a:off x="1009650" y="2386612"/>
             <a:ext cx="495300" cy="228600"/>
           </a:xfrm>
           <a:prstGeom prst="roundRect">
@@ -46609,7 +46609,7 @@
         </p:nvSpPr>
         <p:spPr>
           <a:xfrm rot="0" flipH="0" flipV="0">
-            <a:off x="1143000" y="2019300"/>
+            <a:off x="1143000" y="2434237"/>
             <a:ext cx="238125" cy="142875"/>
           </a:xfrm>
           <a:prstGeom prst="rect"/>
@@ -46644,7 +46644,7 @@
         </p:nvSpPr>
         <p:spPr>
           <a:xfrm rot="0" flipH="0" flipV="0">
-            <a:off x="1619250" y="1962150"/>
+            <a:off x="1619250" y="2377087"/>
             <a:ext cx="4800600" cy="266700"/>
           </a:xfrm>
           <a:prstGeom prst="rect"/>
@@ -46679,7 +46679,7 @@
         </p:nvSpPr>
         <p:spPr>
           <a:xfrm rot="0" flipH="0" flipV="0">
-            <a:off x="1009650" y="2333625"/>
+            <a:off x="1009650" y="2748562"/>
             <a:ext cx="495300" cy="228600"/>
           </a:xfrm>
           <a:prstGeom prst="roundRect">
@@ -46705,7 +46705,7 @@
         </p:nvSpPr>
         <p:spPr>
           <a:xfrm rot="0" flipH="0" flipV="0">
-            <a:off x="1143000" y="2381250"/>
+            <a:off x="1143000" y="2796187"/>
             <a:ext cx="238125" cy="142875"/>
           </a:xfrm>
           <a:prstGeom prst="rect"/>
@@ -46740,7 +46740,7 @@
         </p:nvSpPr>
         <p:spPr>
           <a:xfrm rot="0" flipH="0" flipV="0">
-            <a:off x="1619250" y="2324100"/>
+            <a:off x="1619250" y="2739037"/>
             <a:ext cx="4800600" cy="266700"/>
           </a:xfrm>
           <a:prstGeom prst="rect"/>
@@ -46775,7 +46775,7 @@
         </p:nvSpPr>
         <p:spPr>
           <a:xfrm rot="0" flipH="0" flipV="0">
-            <a:off x="1009650" y="2695575"/>
+            <a:off x="1009650" y="3110512"/>
             <a:ext cx="495300" cy="228600"/>
           </a:xfrm>
           <a:prstGeom prst="roundRect">
@@ -46801,7 +46801,7 @@
         </p:nvSpPr>
         <p:spPr>
           <a:xfrm rot="0" flipH="0" flipV="0">
-            <a:off x="1143000" y="2743200"/>
+            <a:off x="1143000" y="3158137"/>
             <a:ext cx="238125" cy="142875"/>
           </a:xfrm>
           <a:prstGeom prst="rect"/>
@@ -46836,7 +46836,7 @@
         </p:nvSpPr>
         <p:spPr>
           <a:xfrm rot="0" flipH="0" flipV="0">
-            <a:off x="1619250" y="2686050"/>
+            <a:off x="1619250" y="3100987"/>
             <a:ext cx="4800600" cy="266700"/>
           </a:xfrm>
           <a:prstGeom prst="rect"/>
@@ -46871,7 +46871,7 @@
         </p:nvSpPr>
         <p:spPr>
           <a:xfrm rot="0" flipH="0" flipV="0">
-            <a:off x="800100" y="3238500"/>
+            <a:off x="800100" y="3653437"/>
             <a:ext cx="5867400" cy="285750"/>
           </a:xfrm>
           <a:custGeom>
@@ -46911,7 +46911,7 @@
         </p:nvSpPr>
         <p:spPr>
           <a:xfrm rot="0" flipH="0" flipV="0">
-            <a:off x="971550" y="3238500"/>
+            <a:off x="971550" y="3653437"/>
             <a:ext cx="5657850" cy="285750"/>
           </a:xfrm>
           <a:prstGeom prst="rect"/>
@@ -46976,7 +46976,7 @@
         </p:nvSpPr>
         <p:spPr>
           <a:xfrm rot="0" flipH="0" flipV="0">
-            <a:off x="6915150" y="1819275"/>
+            <a:off x="6915150" y="2234212"/>
             <a:ext cx="4476750" cy="209550"/>
           </a:xfrm>
           <a:prstGeom prst="rect"/>
@@ -47031,7 +47031,7 @@
         </p:nvSpPr>
         <p:spPr>
           <a:xfrm rot="0" flipH="0" flipV="0">
-            <a:off x="6915150" y="2143125"/>
+            <a:off x="6915150" y="2558062"/>
             <a:ext cx="4476750" cy="619125"/>
           </a:xfrm>
           <a:prstGeom prst="roundRect">
@@ -47062,7 +47062,7 @@
         </p:nvSpPr>
         <p:spPr>
           <a:xfrm rot="0" flipH="0" flipV="0">
-            <a:off x="7067550" y="2257425"/>
+            <a:off x="7067550" y="2672362"/>
             <a:ext cx="4171950" cy="171450"/>
           </a:xfrm>
           <a:prstGeom prst="rect"/>
@@ -47151,7 +47151,7 @@
         </p:blipFill>
         <p:spPr>
           <a:xfrm rot="0" flipH="0" flipV="0">
-            <a:off x="7067550" y="2505075"/>
+            <a:off x="7067550" y="2920012"/>
             <a:ext cx="123825" cy="123825"/>
           </a:xfrm>
           <a:prstGeom prst="rect">
@@ -47168,7 +47168,7 @@
         </p:nvSpPr>
         <p:spPr>
           <a:xfrm rot="0" flipH="0" flipV="0">
-            <a:off x="7267575" y="2486025"/>
+            <a:off x="7267575" y="2900962"/>
             <a:ext cx="1352550" cy="161925"/>
           </a:xfrm>
           <a:prstGeom prst="rect"/>
@@ -47213,7 +47213,7 @@
         </p:nvSpPr>
         <p:spPr>
           <a:xfrm rot="0" flipH="0" flipV="0">
-            <a:off x="6915150" y="2876550"/>
+            <a:off x="6915150" y="3291487"/>
             <a:ext cx="4476750" cy="619125"/>
           </a:xfrm>
           <a:prstGeom prst="roundRect">
@@ -47244,7 +47244,7 @@
         </p:nvSpPr>
         <p:spPr>
           <a:xfrm rot="0" flipH="0" flipV="0">
-            <a:off x="7067550" y="2990850"/>
+            <a:off x="7067550" y="3405787"/>
             <a:ext cx="4171950" cy="171450"/>
           </a:xfrm>
           <a:prstGeom prst="rect"/>
@@ -47313,7 +47313,7 @@
         </p:blipFill>
         <p:spPr>
           <a:xfrm rot="0" flipH="0" flipV="0">
-            <a:off x="7067550" y="3238500"/>
+            <a:off x="7067550" y="3653437"/>
             <a:ext cx="123825" cy="123825"/>
           </a:xfrm>
           <a:prstGeom prst="rect">
@@ -47330,7 +47330,7 @@
         </p:nvSpPr>
         <p:spPr>
           <a:xfrm rot="0" flipH="0" flipV="0">
-            <a:off x="7267575" y="3219450"/>
+            <a:off x="7267575" y="3634387"/>
             <a:ext cx="1228725" cy="161925"/>
           </a:xfrm>
           <a:prstGeom prst="rect"/>
@@ -47375,7 +47375,7 @@
         </p:nvSpPr>
         <p:spPr>
           <a:xfrm rot="0" flipH="0" flipV="0">
-            <a:off x="6915150" y="3609975"/>
+            <a:off x="6915150" y="4024912"/>
             <a:ext cx="4476750" cy="619125"/>
           </a:xfrm>
           <a:prstGeom prst="roundRect">
@@ -47406,7 +47406,7 @@
         </p:nvSpPr>
         <p:spPr>
           <a:xfrm rot="0" flipH="0" flipV="0">
-            <a:off x="7067550" y="3724275"/>
+            <a:off x="7067550" y="4139212"/>
             <a:ext cx="4171950" cy="171450"/>
           </a:xfrm>
           <a:prstGeom prst="rect"/>
@@ -47515,7 +47515,7 @@
         </p:blipFill>
         <p:spPr>
           <a:xfrm rot="0" flipH="0" flipV="0">
-            <a:off x="7067550" y="3971925"/>
+            <a:off x="7067550" y="4386862"/>
             <a:ext cx="123825" cy="123825"/>
           </a:xfrm>
           <a:prstGeom prst="rect">
@@ -47532,7 +47532,7 @@
         </p:nvSpPr>
         <p:spPr>
           <a:xfrm rot="0" flipH="0" flipV="0">
-            <a:off x="7267575" y="3952875"/>
+            <a:off x="7267575" y="4367812"/>
             <a:ext cx="1123950" cy="161925"/>
           </a:xfrm>
           <a:prstGeom prst="rect"/>
@@ -47577,7 +47577,7 @@
         </p:nvSpPr>
         <p:spPr>
           <a:xfrm rot="0" flipH="0" flipV="0">
-            <a:off x="6915150" y="4343400"/>
+            <a:off x="6915150" y="4758337"/>
             <a:ext cx="4476750" cy="619125"/>
           </a:xfrm>
           <a:prstGeom prst="roundRect">
@@ -47608,7 +47608,7 @@
         </p:nvSpPr>
         <p:spPr>
           <a:xfrm rot="0" flipH="0" flipV="0">
-            <a:off x="7067550" y="4457700"/>
+            <a:off x="7067550" y="4872637"/>
             <a:ext cx="4171950" cy="171450"/>
           </a:xfrm>
           <a:prstGeom prst="rect"/>
@@ -47677,7 +47677,7 @@
         </p:blipFill>
         <p:spPr>
           <a:xfrm rot="0" flipH="0" flipV="0">
-            <a:off x="7067550" y="4705350"/>
+            <a:off x="7067550" y="5120287"/>
             <a:ext cx="123825" cy="123825"/>
           </a:xfrm>
           <a:prstGeom prst="rect">
@@ -47694,7 +47694,7 @@
         </p:nvSpPr>
         <p:spPr>
           <a:xfrm rot="0" flipH="0" flipV="0">
-            <a:off x="7267575" y="4686300"/>
+            <a:off x="7267575" y="5101237"/>
             <a:ext cx="1409700" cy="161925"/>
           </a:xfrm>
           <a:prstGeom prst="rect"/>
@@ -47739,7 +47739,7 @@
         </p:nvSpPr>
         <p:spPr>
           <a:xfrm rot="0" flipH="0" flipV="0">
-            <a:off x="6915150" y="5076825"/>
+            <a:off x="6915150" y="5491762"/>
             <a:ext cx="4476750" cy="152400"/>
           </a:xfrm>
           <a:prstGeom prst="rect"/>

--- a/lectures/week-02/lecture-zh.pptx
+++ b/lectures/week-02/lecture-zh.pptx
@@ -1982,7 +1982,7 @@
           <p:nvPr/>
         </p:nvPicPr>
         <p:blipFill>
-          <a:blip>
+          <a:blip r:embed="rId4">
             <a:extLst>
               <a:ext uri="{96DAC541-7B7A-43D3-8B79-37D633B846F1}">
                 <asvg:svgBlip r:embed="rId1"/>
@@ -2190,7 +2190,7 @@
           <p:nvPr/>
         </p:nvPicPr>
         <p:blipFill>
-          <a:blip>
+          <a:blip r:embed="rId5">
             <a:extLst>
               <a:ext uri="{96DAC541-7B7A-43D3-8B79-37D633B846F1}">
                 <asvg:svgBlip r:embed="rId2"/>
@@ -2398,7 +2398,7 @@
           <p:nvPr/>
         </p:nvPicPr>
         <p:blipFill>
-          <a:blip>
+          <a:blip r:embed="rId6">
             <a:extLst>
               <a:ext uri="{96DAC541-7B7A-43D3-8B79-37D633B846F1}">
                 <asvg:svgBlip r:embed="rId3"/>
@@ -3722,7 +3722,7 @@
           <p:nvPr/>
         </p:nvPicPr>
         <p:blipFill>
-          <a:blip>
+          <a:blip r:embed="rId3">
             <a:extLst>
               <a:ext uri="{96DAC541-7B7A-43D3-8B79-37D633B846F1}">
                 <asvg:svgBlip r:embed="rId1"/>
@@ -3843,7 +3843,7 @@
           <p:nvPr/>
         </p:nvPicPr>
         <p:blipFill>
-          <a:blip>
+          <a:blip r:embed="rId4">
             <a:extLst>
               <a:ext uri="{96DAC541-7B7A-43D3-8B79-37D633B846F1}">
                 <asvg:svgBlip r:embed="rId2"/>
@@ -3974,7 +3974,7 @@
           <p:nvPr/>
         </p:nvPicPr>
         <p:blipFill>
-          <a:blip>
+          <a:blip r:embed="rId3">
             <a:extLst>
               <a:ext uri="{96DAC541-7B7A-43D3-8B79-37D633B846F1}">
                 <asvg:svgBlip r:embed="rId1"/>
@@ -6071,7 +6071,7 @@
           <p:nvPr/>
         </p:nvPicPr>
         <p:blipFill>
-          <a:blip>
+          <a:blip r:embed="rId2">
             <a:extLst>
               <a:ext uri="{96DAC541-7B7A-43D3-8B79-37D633B846F1}">
                 <asvg:svgBlip r:embed="rId1"/>
@@ -6102,7 +6102,7 @@
           <p:nvPr/>
         </p:nvPicPr>
         <p:blipFill>
-          <a:blip>
+          <a:blip r:embed="rId2">
             <a:extLst>
               <a:ext uri="{96DAC541-7B7A-43D3-8B79-37D633B846F1}">
                 <asvg:svgBlip r:embed="rId1"/>
@@ -6133,7 +6133,7 @@
           <p:nvPr/>
         </p:nvPicPr>
         <p:blipFill>
-          <a:blip>
+          <a:blip r:embed="rId2">
             <a:extLst>
               <a:ext uri="{96DAC541-7B7A-43D3-8B79-37D633B846F1}">
                 <asvg:svgBlip r:embed="rId1"/>
@@ -6164,7 +6164,7 @@
           <p:nvPr/>
         </p:nvPicPr>
         <p:blipFill>
-          <a:blip>
+          <a:blip r:embed="rId2">
             <a:extLst>
               <a:ext uri="{96DAC541-7B7A-43D3-8B79-37D633B846F1}">
                 <asvg:svgBlip r:embed="rId1"/>
@@ -9493,7 +9493,7 @@
           <p:nvPr/>
         </p:nvPicPr>
         <p:blipFill>
-          <a:blip>
+          <a:blip r:embed="rId5">
             <a:extLst>
               <a:ext uri="{96DAC541-7B7A-43D3-8B79-37D633B846F1}">
                 <asvg:svgBlip r:embed="rId1"/>
@@ -9819,7 +9819,7 @@
           <p:nvPr/>
         </p:nvPicPr>
         <p:blipFill>
-          <a:blip>
+          <a:blip r:embed="rId6">
             <a:extLst>
               <a:ext uri="{96DAC541-7B7A-43D3-8B79-37D633B846F1}">
                 <asvg:svgBlip r:embed="rId2"/>
@@ -10145,7 +10145,7 @@
           <p:nvPr/>
         </p:nvPicPr>
         <p:blipFill>
-          <a:blip>
+          <a:blip r:embed="rId7">
             <a:extLst>
               <a:ext uri="{96DAC541-7B7A-43D3-8B79-37D633B846F1}">
                 <asvg:svgBlip r:embed="rId3"/>
@@ -10471,7 +10471,7 @@
           <p:nvPr/>
         </p:nvPicPr>
         <p:blipFill>
-          <a:blip>
+          <a:blip r:embed="rId8">
             <a:extLst>
               <a:ext uri="{96DAC541-7B7A-43D3-8B79-37D633B846F1}">
                 <asvg:svgBlip r:embed="rId4"/>
@@ -17781,7 +17781,7 @@
           <p:nvPr/>
         </p:nvPicPr>
         <p:blipFill>
-          <a:blip>
+          <a:blip r:embed="rId2">
             <a:extLst>
               <a:ext uri="{96DAC541-7B7A-43D3-8B79-37D633B846F1}">
                 <asvg:svgBlip r:embed="rId1"/>
@@ -17812,7 +17812,7 @@
           <p:nvPr/>
         </p:nvPicPr>
         <p:blipFill>
-          <a:blip>
+          <a:blip r:embed="rId2">
             <a:extLst>
               <a:ext uri="{96DAC541-7B7A-43D3-8B79-37D633B846F1}">
                 <asvg:svgBlip r:embed="rId1"/>
@@ -17843,7 +17843,7 @@
           <p:nvPr/>
         </p:nvPicPr>
         <p:blipFill>
-          <a:blip>
+          <a:blip r:embed="rId2">
             <a:extLst>
               <a:ext uri="{96DAC541-7B7A-43D3-8B79-37D633B846F1}">
                 <asvg:svgBlip r:embed="rId1"/>
@@ -17874,7 +17874,7 @@
           <p:nvPr/>
         </p:nvPicPr>
         <p:blipFill>
-          <a:blip>
+          <a:blip r:embed="rId2">
             <a:extLst>
               <a:ext uri="{96DAC541-7B7A-43D3-8B79-37D633B846F1}">
                 <asvg:svgBlip r:embed="rId1"/>
@@ -17905,7 +17905,7 @@
           <p:nvPr/>
         </p:nvPicPr>
         <p:blipFill>
-          <a:blip>
+          <a:blip r:embed="rId2">
             <a:extLst>
               <a:ext uri="{96DAC541-7B7A-43D3-8B79-37D633B846F1}">
                 <asvg:svgBlip r:embed="rId1"/>
@@ -18687,7 +18687,7 @@
           <p:nvPr/>
         </p:nvPicPr>
         <p:blipFill>
-          <a:blip>
+          <a:blip r:embed="rId2">
             <a:extLst>
               <a:ext uri="{96DAC541-7B7A-43D3-8B79-37D633B846F1}">
                 <asvg:svgBlip r:embed="rId1"/>
@@ -19024,7 +19024,7 @@
           <p:nvPr/>
         </p:nvPicPr>
         <p:blipFill>
-          <a:blip>
+          <a:blip r:embed="rId2">
             <a:extLst>
               <a:ext uri="{96DAC541-7B7A-43D3-8B79-37D633B846F1}">
                 <asvg:svgBlip r:embed="rId1"/>
@@ -19311,7 +19311,7 @@
           <p:nvPr/>
         </p:nvPicPr>
         <p:blipFill>
-          <a:blip>
+          <a:blip r:embed="rId2">
             <a:extLst>
               <a:ext uri="{96DAC541-7B7A-43D3-8B79-37D633B846F1}">
                 <asvg:svgBlip r:embed="rId1"/>
@@ -19598,7 +19598,7 @@
           <p:nvPr/>
         </p:nvPicPr>
         <p:blipFill>
-          <a:blip>
+          <a:blip r:embed="rId2">
             <a:extLst>
               <a:ext uri="{96DAC541-7B7A-43D3-8B79-37D633B846F1}">
                 <asvg:svgBlip r:embed="rId1"/>
@@ -19905,7 +19905,7 @@
           <p:nvPr/>
         </p:nvPicPr>
         <p:blipFill>
-          <a:blip>
+          <a:blip r:embed="rId2">
             <a:extLst>
               <a:ext uri="{96DAC541-7B7A-43D3-8B79-37D633B846F1}">
                 <asvg:svgBlip r:embed="rId1"/>
@@ -20203,7 +20203,7 @@
           <p:nvPr/>
         </p:nvPicPr>
         <p:blipFill>
-          <a:blip>
+          <a:blip r:embed="rId6">
             <a:extLst>
               <a:ext uri="{96DAC541-7B7A-43D3-8B79-37D633B846F1}">
                 <asvg:svgBlip r:embed="rId1"/>
@@ -20336,7 +20336,7 @@
           <p:nvPr/>
         </p:nvPicPr>
         <p:blipFill>
-          <a:blip>
+          <a:blip r:embed="rId7">
             <a:extLst>
               <a:ext uri="{96DAC541-7B7A-43D3-8B79-37D633B846F1}">
                 <asvg:svgBlip r:embed="rId2"/>
@@ -20585,7 +20585,7 @@
           <p:nvPr/>
         </p:nvPicPr>
         <p:blipFill>
-          <a:blip>
+          <a:blip r:embed="rId8">
             <a:extLst>
               <a:ext uri="{96DAC541-7B7A-43D3-8B79-37D633B846F1}">
                 <asvg:svgBlip r:embed="rId3"/>
@@ -20874,7 +20874,7 @@
           <p:nvPr/>
         </p:nvPicPr>
         <p:blipFill>
-          <a:blip>
+          <a:blip r:embed="rId9">
             <a:extLst>
               <a:ext uri="{96DAC541-7B7A-43D3-8B79-37D633B846F1}">
                 <asvg:svgBlip r:embed="rId4"/>
@@ -21183,7 +21183,7 @@
           <p:nvPr/>
         </p:nvPicPr>
         <p:blipFill>
-          <a:blip>
+          <a:blip r:embed="rId10">
             <a:extLst>
               <a:ext uri="{96DAC541-7B7A-43D3-8B79-37D633B846F1}">
                 <asvg:svgBlip r:embed="rId5"/>
@@ -21696,7 +21696,7 @@
           <p:nvPr/>
         </p:nvPicPr>
         <p:blipFill>
-          <a:blip>
+          <a:blip r:embed="rId4">
             <a:extLst>
               <a:ext uri="{96DAC541-7B7A-43D3-8B79-37D633B846F1}">
                 <asvg:svgBlip r:embed="rId1"/>
@@ -22028,7 +22028,7 @@
           <p:nvPr/>
         </p:nvPicPr>
         <p:blipFill>
-          <a:blip>
+          <a:blip r:embed="rId5">
             <a:extLst>
               <a:ext uri="{96DAC541-7B7A-43D3-8B79-37D633B846F1}">
                 <asvg:svgBlip r:embed="rId2"/>
@@ -22330,7 +22330,7 @@
           <p:nvPr/>
         </p:nvPicPr>
         <p:blipFill>
-          <a:blip>
+          <a:blip r:embed="rId6">
             <a:extLst>
               <a:ext uri="{96DAC541-7B7A-43D3-8B79-37D633B846F1}">
                 <asvg:svgBlip r:embed="rId3"/>
@@ -25248,7 +25248,7 @@
           <p:nvPr/>
         </p:nvPicPr>
         <p:blipFill>
-          <a:blip>
+          <a:blip r:embed="rId7">
             <a:extLst>
               <a:ext uri="{96DAC541-7B7A-43D3-8B79-37D633B846F1}">
                 <asvg:svgBlip r:embed="rId1"/>
@@ -25604,7 +25604,7 @@
           <p:nvPr/>
         </p:nvPicPr>
         <p:blipFill>
-          <a:blip>
+          <a:blip r:embed="rId8">
             <a:extLst>
               <a:ext uri="{96DAC541-7B7A-43D3-8B79-37D633B846F1}">
                 <asvg:svgBlip r:embed="rId2"/>
@@ -25960,7 +25960,7 @@
           <p:nvPr/>
         </p:nvPicPr>
         <p:blipFill>
-          <a:blip>
+          <a:blip r:embed="rId9">
             <a:extLst>
               <a:ext uri="{96DAC541-7B7A-43D3-8B79-37D633B846F1}">
                 <asvg:svgBlip r:embed="rId3"/>
@@ -26266,7 +26266,7 @@
           <p:nvPr/>
         </p:nvPicPr>
         <p:blipFill>
-          <a:blip>
+          <a:blip r:embed="rId10">
             <a:extLst>
               <a:ext uri="{96DAC541-7B7A-43D3-8B79-37D633B846F1}">
                 <asvg:svgBlip r:embed="rId4"/>
@@ -26612,7 +26612,7 @@
           <p:nvPr/>
         </p:nvPicPr>
         <p:blipFill>
-          <a:blip>
+          <a:blip r:embed="rId11">
             <a:extLst>
               <a:ext uri="{96DAC541-7B7A-43D3-8B79-37D633B846F1}">
                 <asvg:svgBlip r:embed="rId5"/>
@@ -26803,7 +26803,7 @@
           <p:nvPr/>
         </p:nvPicPr>
         <p:blipFill>
-          <a:blip>
+          <a:blip r:embed="rId12">
             <a:extLst>
               <a:ext uri="{96DAC541-7B7A-43D3-8B79-37D633B846F1}">
                 <asvg:svgBlip r:embed="rId6"/>
@@ -26834,7 +26834,7 @@
           <p:nvPr/>
         </p:nvPicPr>
         <p:blipFill>
-          <a:blip>
+          <a:blip r:embed="rId12">
             <a:extLst>
               <a:ext uri="{96DAC541-7B7A-43D3-8B79-37D633B846F1}">
                 <asvg:svgBlip r:embed="rId6"/>
@@ -26865,7 +26865,7 @@
           <p:nvPr/>
         </p:nvPicPr>
         <p:blipFill>
-          <a:blip>
+          <a:blip r:embed="rId12">
             <a:extLst>
               <a:ext uri="{96DAC541-7B7A-43D3-8B79-37D633B846F1}">
                 <asvg:svgBlip r:embed="rId6"/>
@@ -26896,7 +26896,7 @@
           <p:nvPr/>
         </p:nvPicPr>
         <p:blipFill>
-          <a:blip>
+          <a:blip r:embed="rId12">
             <a:extLst>
               <a:ext uri="{96DAC541-7B7A-43D3-8B79-37D633B846F1}">
                 <asvg:svgBlip r:embed="rId6"/>
@@ -30373,7 +30373,7 @@
           <p:nvPr/>
         </p:nvPicPr>
         <p:blipFill>
-          <a:blip>
+          <a:blip r:embed="rId4">
             <a:extLst>
               <a:ext uri="{96DAC541-7B7A-43D3-8B79-37D633B846F1}">
                 <asvg:svgBlip r:embed="rId1"/>
@@ -30687,7 +30687,7 @@
           <p:nvPr/>
         </p:nvPicPr>
         <p:blipFill>
-          <a:blip>
+          <a:blip r:embed="rId5">
             <a:extLst>
               <a:ext uri="{96DAC541-7B7A-43D3-8B79-37D633B846F1}">
                 <asvg:svgBlip r:embed="rId2"/>
@@ -31023,7 +31023,7 @@
           <p:nvPr/>
         </p:nvPicPr>
         <p:blipFill>
-          <a:blip>
+          <a:blip r:embed="rId6">
             <a:extLst>
               <a:ext uri="{96DAC541-7B7A-43D3-8B79-37D633B846F1}">
                 <asvg:svgBlip r:embed="rId3"/>
@@ -33865,7 +33865,7 @@
           <p:nvPr/>
         </p:nvPicPr>
         <p:blipFill>
-          <a:blip>
+          <a:blip r:embed="rId6">
             <a:extLst>
               <a:ext uri="{96DAC541-7B7A-43D3-8B79-37D633B846F1}">
                 <asvg:svgBlip r:embed="rId1"/>
@@ -34006,7 +34006,7 @@
           <p:nvPr/>
         </p:nvPicPr>
         <p:blipFill>
-          <a:blip>
+          <a:blip r:embed="rId7">
             <a:extLst>
               <a:ext uri="{96DAC541-7B7A-43D3-8B79-37D633B846F1}">
                 <asvg:svgBlip r:embed="rId2"/>
@@ -34094,7 +34094,7 @@
           <p:nvPr/>
         </p:nvPicPr>
         <p:blipFill>
-          <a:blip>
+          <a:blip r:embed="rId8">
             <a:extLst>
               <a:ext uri="{96DAC541-7B7A-43D3-8B79-37D633B846F1}">
                 <asvg:svgBlip r:embed="rId3"/>
@@ -34275,7 +34275,7 @@
           <p:nvPr/>
         </p:nvPicPr>
         <p:blipFill>
-          <a:blip>
+          <a:blip r:embed="rId7">
             <a:extLst>
               <a:ext uri="{96DAC541-7B7A-43D3-8B79-37D633B846F1}">
                 <asvg:svgBlip r:embed="rId2"/>
@@ -34363,7 +34363,7 @@
           <p:nvPr/>
         </p:nvPicPr>
         <p:blipFill>
-          <a:blip>
+          <a:blip r:embed="rId9">
             <a:extLst>
               <a:ext uri="{96DAC541-7B7A-43D3-8B79-37D633B846F1}">
                 <asvg:svgBlip r:embed="rId4"/>
@@ -34484,7 +34484,7 @@
           <p:nvPr/>
         </p:nvPicPr>
         <p:blipFill>
-          <a:blip>
+          <a:blip r:embed="rId7">
             <a:extLst>
               <a:ext uri="{96DAC541-7B7A-43D3-8B79-37D633B846F1}">
                 <asvg:svgBlip r:embed="rId2"/>
@@ -34572,7 +34572,7 @@
           <p:nvPr/>
         </p:nvPicPr>
         <p:blipFill>
-          <a:blip>
+          <a:blip r:embed="rId10">
             <a:extLst>
               <a:ext uri="{96DAC541-7B7A-43D3-8B79-37D633B846F1}">
                 <asvg:svgBlip r:embed="rId5"/>
@@ -34703,7 +34703,7 @@
           <p:nvPr/>
         </p:nvPicPr>
         <p:blipFill>
-          <a:blip>
+          <a:blip r:embed="rId7">
             <a:extLst>
               <a:ext uri="{96DAC541-7B7A-43D3-8B79-37D633B846F1}">
                 <asvg:svgBlip r:embed="rId2"/>
@@ -38532,7 +38532,7 @@
           <p:nvPr/>
         </p:nvPicPr>
         <p:blipFill>
-          <a:blip>
+          <a:blip r:embed="rId5">
             <a:extLst>
               <a:ext uri="{96DAC541-7B7A-43D3-8B79-37D633B846F1}">
                 <asvg:svgBlip r:embed="rId1"/>
@@ -38629,7 +38629,7 @@
           <p:nvPr/>
         </p:nvPicPr>
         <p:blipFill>
-          <a:blip>
+          <a:blip r:embed="rId5">
             <a:extLst>
               <a:ext uri="{96DAC541-7B7A-43D3-8B79-37D633B846F1}">
                 <asvg:svgBlip r:embed="rId1"/>
@@ -38756,7 +38756,7 @@
           <p:nvPr/>
         </p:nvPicPr>
         <p:blipFill>
-          <a:blip>
+          <a:blip r:embed="rId5">
             <a:extLst>
               <a:ext uri="{96DAC541-7B7A-43D3-8B79-37D633B846F1}">
                 <asvg:svgBlip r:embed="rId1"/>
@@ -38913,7 +38913,7 @@
           <p:nvPr/>
         </p:nvPicPr>
         <p:blipFill>
-          <a:blip>
+          <a:blip r:embed="rId5">
             <a:extLst>
               <a:ext uri="{96DAC541-7B7A-43D3-8B79-37D633B846F1}">
                 <asvg:svgBlip r:embed="rId1"/>
@@ -39070,7 +39070,7 @@
           <p:nvPr/>
         </p:nvPicPr>
         <p:blipFill>
-          <a:blip>
+          <a:blip r:embed="rId5">
             <a:extLst>
               <a:ext uri="{96DAC541-7B7A-43D3-8B79-37D633B846F1}">
                 <asvg:svgBlip r:embed="rId1"/>
@@ -39297,7 +39297,7 @@
           <p:nvPr/>
         </p:nvPicPr>
         <p:blipFill>
-          <a:blip>
+          <a:blip r:embed="rId6">
             <a:extLst>
               <a:ext uri="{96DAC541-7B7A-43D3-8B79-37D633B846F1}">
                 <asvg:svgBlip r:embed="rId2"/>
@@ -39511,7 +39511,7 @@
           <p:nvPr/>
         </p:nvPicPr>
         <p:blipFill>
-          <a:blip>
+          <a:blip r:embed="rId7">
             <a:extLst>
               <a:ext uri="{96DAC541-7B7A-43D3-8B79-37D633B846F1}">
                 <asvg:svgBlip r:embed="rId3"/>
@@ -39653,7 +39653,7 @@
           <p:nvPr/>
         </p:nvPicPr>
         <p:blipFill>
-          <a:blip>
+          <a:blip r:embed="rId8">
             <a:extLst>
               <a:ext uri="{96DAC541-7B7A-43D3-8B79-37D633B846F1}">
                 <asvg:svgBlip r:embed="rId4"/>
@@ -40610,7 +40610,7 @@
           <p:nvPr/>
         </p:nvPicPr>
         <p:blipFill>
-          <a:blip>
+          <a:blip r:embed="rId3">
             <a:extLst>
               <a:ext uri="{96DAC541-7B7A-43D3-8B79-37D633B846F1}">
                 <asvg:svgBlip r:embed="rId1"/>
@@ -40742,7 +40742,7 @@
           <p:nvPr/>
         </p:nvPicPr>
         <p:blipFill>
-          <a:blip>
+          <a:blip r:embed="rId3">
             <a:extLst>
               <a:ext uri="{96DAC541-7B7A-43D3-8B79-37D633B846F1}">
                 <asvg:svgBlip r:embed="rId1"/>
@@ -40984,7 +40984,7 @@
           <p:nvPr/>
         </p:nvPicPr>
         <p:blipFill>
-          <a:blip>
+          <a:blip r:embed="rId3">
             <a:extLst>
               <a:ext uri="{96DAC541-7B7A-43D3-8B79-37D633B846F1}">
                 <asvg:svgBlip r:embed="rId1"/>
@@ -41126,7 +41126,7 @@
           <p:nvPr/>
         </p:nvPicPr>
         <p:blipFill>
-          <a:blip>
+          <a:blip r:embed="rId3">
             <a:extLst>
               <a:ext uri="{96DAC541-7B7A-43D3-8B79-37D633B846F1}">
                 <asvg:svgBlip r:embed="rId1"/>
@@ -41288,7 +41288,7 @@
           <p:nvPr/>
         </p:nvPicPr>
         <p:blipFill>
-          <a:blip>
+          <a:blip r:embed="rId3">
             <a:extLst>
               <a:ext uri="{96DAC541-7B7A-43D3-8B79-37D633B846F1}">
                 <asvg:svgBlip r:embed="rId1"/>
@@ -41601,7 +41601,7 @@
           <p:nvPr/>
         </p:nvPicPr>
         <p:blipFill>
-          <a:blip>
+          <a:blip r:embed="rId4">
             <a:extLst>
               <a:ext uri="{96DAC541-7B7A-43D3-8B79-37D633B846F1}">
                 <asvg:svgBlip r:embed="rId2"/>
@@ -43347,7 +43347,7 @@
           <p:nvPr/>
         </p:nvPicPr>
         <p:blipFill>
-          <a:blip>
+          <a:blip r:embed="rId7">
             <a:extLst>
               <a:ext uri="{96DAC541-7B7A-43D3-8B79-37D633B846F1}">
                 <asvg:svgBlip r:embed="rId1"/>
@@ -43540,7 +43540,7 @@
           <p:nvPr/>
         </p:nvPicPr>
         <p:blipFill>
-          <a:blip>
+          <a:blip r:embed="rId8">
             <a:extLst>
               <a:ext uri="{96DAC541-7B7A-43D3-8B79-37D633B846F1}">
                 <asvg:svgBlip r:embed="rId2"/>
@@ -43733,7 +43733,7 @@
           <p:nvPr/>
         </p:nvPicPr>
         <p:blipFill>
-          <a:blip>
+          <a:blip r:embed="rId9">
             <a:extLst>
               <a:ext uri="{96DAC541-7B7A-43D3-8B79-37D633B846F1}">
                 <asvg:svgBlip r:embed="rId3"/>
@@ -43926,7 +43926,7 @@
           <p:nvPr/>
         </p:nvPicPr>
         <p:blipFill>
-          <a:blip>
+          <a:blip r:embed="rId10">
             <a:extLst>
               <a:ext uri="{96DAC541-7B7A-43D3-8B79-37D633B846F1}">
                 <asvg:svgBlip r:embed="rId4"/>
@@ -44119,7 +44119,7 @@
           <p:nvPr/>
         </p:nvPicPr>
         <p:blipFill>
-          <a:blip>
+          <a:blip r:embed="rId11">
             <a:extLst>
               <a:ext uri="{96DAC541-7B7A-43D3-8B79-37D633B846F1}">
                 <asvg:svgBlip r:embed="rId5"/>
@@ -44312,7 +44312,7 @@
           <p:nvPr/>
         </p:nvPicPr>
         <p:blipFill>
-          <a:blip>
+          <a:blip r:embed="rId12">
             <a:extLst>
               <a:ext uri="{96DAC541-7B7A-43D3-8B79-37D633B846F1}">
                 <asvg:svgBlip r:embed="rId6"/>
@@ -44779,7 +44779,7 @@
           <p:nvPr/>
         </p:nvPicPr>
         <p:blipFill>
-          <a:blip>
+          <a:blip r:embed="rId4">
             <a:extLst>
               <a:ext uri="{96DAC541-7B7A-43D3-8B79-37D633B846F1}">
                 <asvg:svgBlip r:embed="rId1"/>
@@ -45172,7 +45172,7 @@
           <p:nvPr/>
         </p:nvPicPr>
         <p:blipFill>
-          <a:blip>
+          <a:blip r:embed="rId5">
             <a:extLst>
               <a:ext uri="{96DAC541-7B7A-43D3-8B79-37D633B846F1}">
                 <asvg:svgBlip r:embed="rId2"/>
@@ -45563,7 +45563,7 @@
           <p:nvPr/>
         </p:nvPicPr>
         <p:blipFill>
-          <a:blip>
+          <a:blip r:embed="rId6">
             <a:extLst>
               <a:ext uri="{96DAC541-7B7A-43D3-8B79-37D633B846F1}">
                 <asvg:svgBlip r:embed="rId3"/>
@@ -47138,7 +47138,7 @@
           <p:nvPr/>
         </p:nvPicPr>
         <p:blipFill>
-          <a:blip>
+          <a:blip r:embed="rId4">
             <a:extLst>
               <a:ext uri="{96DAC541-7B7A-43D3-8B79-37D633B846F1}">
                 <asvg:svgBlip r:embed="rId1"/>
@@ -47300,7 +47300,7 @@
           <p:nvPr/>
         </p:nvPicPr>
         <p:blipFill>
-          <a:blip>
+          <a:blip r:embed="rId5">
             <a:extLst>
               <a:ext uri="{96DAC541-7B7A-43D3-8B79-37D633B846F1}">
                 <asvg:svgBlip r:embed="rId2"/>
@@ -47502,7 +47502,7 @@
           <p:nvPr/>
         </p:nvPicPr>
         <p:blipFill>
-          <a:blip>
+          <a:blip r:embed="rId6">
             <a:extLst>
               <a:ext uri="{96DAC541-7B7A-43D3-8B79-37D633B846F1}">
                 <asvg:svgBlip r:embed="rId3"/>
@@ -47664,7 +47664,7 @@
           <p:nvPr/>
         </p:nvPicPr>
         <p:blipFill>
-          <a:blip>
+          <a:blip r:embed="rId4">
             <a:extLst>
               <a:ext uri="{96DAC541-7B7A-43D3-8B79-37D633B846F1}">
                 <asvg:svgBlip r:embed="rId1"/>
@@ -49618,7 +49618,7 @@
           <p:nvPr/>
         </p:nvPicPr>
         <p:blipFill>
-          <a:blip>
+          <a:blip r:embed="rId2">
             <a:extLst>
               <a:ext uri="{96DAC541-7B7A-43D3-8B79-37D633B846F1}">
                 <asvg:svgBlip r:embed="rId1"/>
